--- a/cmd-line-101/04-git.pptx
+++ b/cmd-line-101/04-git.pptx
@@ -16509,7 +16509,7 @@
         <p:spPr>
           <a:xfrm>
             <a:off x="1173591" y="1382286"/>
-            <a:ext cx="9844818" cy="3108543"/>
+            <a:ext cx="9844818" cy="4585871"/>
           </a:xfrm>
           <a:prstGeom prst="rect">
             <a:avLst/>
@@ -16584,8 +16584,39 @@
                 <a:latin typeface="Consolas" panose="020B0609020204030204" pitchFamily="49" charset="0"/>
                 <a:ea typeface="Source Sans Pro" panose="020B0503030403020204" pitchFamily="34" charset="0"/>
               </a:rPr>
+              <a:t>Collaborating with others</a:t>
+            </a:r>
+          </a:p>
+          <a:p>
+            <a:pPr marL="742950" indent="-742950">
+              <a:buAutoNum type="arabicPeriod"/>
+            </a:pPr>
+            <a:endParaRPr lang="en-US" sz="3200" dirty="0">
+              <a:latin typeface="Consolas" panose="020B0609020204030204" pitchFamily="49" charset="0"/>
+              <a:ea typeface="Source Sans Pro" panose="020B0503030403020204" pitchFamily="34" charset="0"/>
+            </a:endParaRPr>
+          </a:p>
+          <a:p>
+            <a:pPr marL="742950" indent="-742950">
+              <a:buFontTx/>
+              <a:buAutoNum type="arabicPeriod"/>
+            </a:pPr>
+            <a:r>
+              <a:rPr lang="en-US" sz="3200" dirty="0">
+                <a:latin typeface="Consolas" panose="020B0609020204030204" pitchFamily="49" charset="0"/>
+                <a:ea typeface="Source Sans Pro" panose="020B0503030403020204" pitchFamily="34" charset="0"/>
+              </a:rPr>
               <a:t>Resolving merge conflicts</a:t>
             </a:r>
+          </a:p>
+          <a:p>
+            <a:pPr marL="742950" indent="-742950">
+              <a:buAutoNum type="arabicPeriod"/>
+            </a:pPr>
+            <a:endParaRPr lang="en-US" sz="3200" dirty="0">
+              <a:latin typeface="Consolas" panose="020B0609020204030204" pitchFamily="49" charset="0"/>
+              <a:ea typeface="Source Sans Pro" panose="020B0503030403020204" pitchFamily="34" charset="0"/>
+            </a:endParaRPr>
           </a:p>
         </p:txBody>
       </p:sp>

--- a/cmd-line-101/04-git.pptx
+++ b/cmd-line-101/04-git.pptx
@@ -6,7 +6,7 @@
     <p:sldMasterId id="2147483660" r:id="rId2"/>
   </p:sldMasterIdLst>
   <p:notesMasterIdLst>
-    <p:notesMasterId r:id="rId39"/>
+    <p:notesMasterId r:id="rId40"/>
   </p:notesMasterIdLst>
   <p:sldIdLst>
     <p:sldId id="257" r:id="rId3"/>
@@ -29,22 +29,23 @@
     <p:sldId id="454" r:id="rId20"/>
     <p:sldId id="304" r:id="rId21"/>
     <p:sldId id="452" r:id="rId22"/>
-    <p:sldId id="301" r:id="rId23"/>
-    <p:sldId id="455" r:id="rId24"/>
-    <p:sldId id="291" r:id="rId25"/>
-    <p:sldId id="290" r:id="rId26"/>
-    <p:sldId id="464" r:id="rId27"/>
-    <p:sldId id="463" r:id="rId28"/>
-    <p:sldId id="459" r:id="rId29"/>
-    <p:sldId id="456" r:id="rId30"/>
-    <p:sldId id="457" r:id="rId31"/>
-    <p:sldId id="458" r:id="rId32"/>
-    <p:sldId id="287" r:id="rId33"/>
-    <p:sldId id="462" r:id="rId34"/>
-    <p:sldId id="296" r:id="rId35"/>
-    <p:sldId id="295" r:id="rId36"/>
-    <p:sldId id="277" r:id="rId37"/>
-    <p:sldId id="453" r:id="rId38"/>
+    <p:sldId id="465" r:id="rId23"/>
+    <p:sldId id="301" r:id="rId24"/>
+    <p:sldId id="455" r:id="rId25"/>
+    <p:sldId id="291" r:id="rId26"/>
+    <p:sldId id="290" r:id="rId27"/>
+    <p:sldId id="464" r:id="rId28"/>
+    <p:sldId id="463" r:id="rId29"/>
+    <p:sldId id="459" r:id="rId30"/>
+    <p:sldId id="456" r:id="rId31"/>
+    <p:sldId id="457" r:id="rId32"/>
+    <p:sldId id="458" r:id="rId33"/>
+    <p:sldId id="287" r:id="rId34"/>
+    <p:sldId id="462" r:id="rId35"/>
+    <p:sldId id="296" r:id="rId36"/>
+    <p:sldId id="295" r:id="rId37"/>
+    <p:sldId id="277" r:id="rId38"/>
+    <p:sldId id="453" r:id="rId39"/>
   </p:sldIdLst>
   <p:sldSz cx="12192000" cy="6858000"/>
   <p:notesSz cx="6858000" cy="9144000"/>
@@ -1485,7 +1486,7 @@
           <a:p>
             <a:fld id="{09B073C3-34AA-E540-B78C-5CAF7DE85827}" type="slidenum">
               <a:rPr lang="en-US"/>
-              <a:t>23</a:t>
+              <a:t>24</a:t>
             </a:fld>
             <a:endParaRPr lang="en-US"/>
           </a:p>
@@ -1644,7 +1645,7 @@
           <a:p>
             <a:fld id="{09B073C3-34AA-E540-B78C-5CAF7DE85827}" type="slidenum">
               <a:rPr lang="en-US"/>
-              <a:t>24</a:t>
+              <a:t>25</a:t>
             </a:fld>
             <a:endParaRPr lang="en-US"/>
           </a:p>
@@ -1827,7 +1828,7 @@
           <a:p>
             <a:fld id="{09B073C3-34AA-E540-B78C-5CAF7DE85827}" type="slidenum">
               <a:rPr lang="en-US"/>
-              <a:t>25</a:t>
+              <a:t>26</a:t>
             </a:fld>
             <a:endParaRPr lang="en-US"/>
           </a:p>
@@ -2118,7 +2119,7 @@
           <a:p>
             <a:fld id="{09B073C3-34AA-E540-B78C-5CAF7DE85827}" type="slidenum">
               <a:rPr lang="en-US"/>
-              <a:t>26</a:t>
+              <a:t>27</a:t>
             </a:fld>
             <a:endParaRPr lang="en-US"/>
           </a:p>
@@ -2301,7 +2302,7 @@
           <a:p>
             <a:fld id="{09B073C3-34AA-E540-B78C-5CAF7DE85827}" type="slidenum">
               <a:rPr lang="en-US"/>
-              <a:t>27</a:t>
+              <a:t>28</a:t>
             </a:fld>
             <a:endParaRPr lang="en-US"/>
           </a:p>
@@ -2484,7 +2485,7 @@
           <a:p>
             <a:fld id="{09B073C3-34AA-E540-B78C-5CAF7DE85827}" type="slidenum">
               <a:rPr lang="en-US"/>
-              <a:t>28</a:t>
+              <a:t>29</a:t>
             </a:fld>
             <a:endParaRPr lang="en-US"/>
           </a:p>
@@ -2667,7 +2668,7 @@
           <a:p>
             <a:fld id="{09B073C3-34AA-E540-B78C-5CAF7DE85827}" type="slidenum">
               <a:rPr lang="en-US"/>
-              <a:t>29</a:t>
+              <a:t>30</a:t>
             </a:fld>
             <a:endParaRPr lang="en-US"/>
           </a:p>
@@ -2850,7 +2851,7 @@
           <a:p>
             <a:fld id="{09B073C3-34AA-E540-B78C-5CAF7DE85827}" type="slidenum">
               <a:rPr lang="en-US"/>
-              <a:t>30</a:t>
+              <a:t>31</a:t>
             </a:fld>
             <a:endParaRPr lang="en-US"/>
           </a:p>
@@ -2984,7 +2985,7 @@
                 <a:tabLst/>
                 <a:defRPr/>
               </a:pPr>
-              <a:t>31</a:t>
+              <a:t>32</a:t>
             </a:fld>
             <a:endParaRPr kumimoji="0" lang="en-US" sz="1200" b="0" i="0" u="none" strike="noStrike" kern="1200" cap="none" spc="0" normalizeH="0" baseline="0" noProof="0">
               <a:ln>
@@ -17638,7 +17639,7 @@
           <p:cNvPr id="2" name="Title 1">
             <a:extLst>
               <a:ext uri="{FF2B5EF4-FFF2-40B4-BE49-F238E27FC236}">
-                <a16:creationId xmlns:a16="http://schemas.microsoft.com/office/drawing/2014/main" id="{D1EE486C-FDD0-DC42-D1CA-725C2C3450F5}"/>
+                <a16:creationId xmlns:a16="http://schemas.microsoft.com/office/drawing/2014/main" id="{AB54AC60-1C08-6F8F-43AA-277365FD7732}"/>
               </a:ext>
             </a:extLst>
           </p:cNvPr>
@@ -17649,32 +17650,53 @@
             <p:ph type="title"/>
           </p:nvPr>
         </p:nvSpPr>
+        <p:spPr/>
+        <p:txBody>
+          <a:bodyPr/>
+          <a:lstStyle/>
+          <a:p>
+            <a:r>
+              <a:rPr lang="en-US"/>
+              <a:t>Use a gitignore document</a:t>
+            </a:r>
+          </a:p>
+        </p:txBody>
+      </p:sp>
+      <p:pic>
+        <p:nvPicPr>
+          <p:cNvPr id="6" name="Content Placeholder 5" descr="A black screen with white text&#10;&#10;AI-generated content may be incorrect.">
+            <a:extLst>
+              <a:ext uri="{FF2B5EF4-FFF2-40B4-BE49-F238E27FC236}">
+                <a16:creationId xmlns:a16="http://schemas.microsoft.com/office/drawing/2014/main" id="{1B635241-C4FE-CCDA-0FB8-0505427AF520}"/>
+              </a:ext>
+            </a:extLst>
+          </p:cNvPr>
+          <p:cNvPicPr>
+            <a:picLocks noGrp="1" noChangeAspect="1"/>
+          </p:cNvPicPr>
+          <p:nvPr>
+            <p:ph idx="1"/>
+          </p:nvPr>
+        </p:nvPicPr>
+        <p:blipFill>
+          <a:blip r:embed="rId2"/>
+          <a:stretch>
+            <a:fillRect/>
+          </a:stretch>
+        </p:blipFill>
         <p:spPr>
           <a:xfrm>
-            <a:off x="466722" y="586855"/>
-            <a:ext cx="3201366" cy="3387497"/>
-          </a:xfrm>
-        </p:spPr>
-        <p:txBody>
-          <a:bodyPr anchor="b">
-            <a:normAutofit/>
-          </a:bodyPr>
-          <a:lstStyle/>
-          <a:p>
-            <a:pPr algn="r"/>
-            <a:r>
-              <a:rPr lang="en-US" sz="4000"/>
-              <a:t>Git takeaways</a:t>
-            </a:r>
-          </a:p>
-        </p:txBody>
-      </p:sp>
-      <p:sp>
-        <p:nvSpPr>
-          <p:cNvPr id="3" name="Content Placeholder 2">
-            <a:extLst>
-              <a:ext uri="{FF2B5EF4-FFF2-40B4-BE49-F238E27FC236}">
-                <a16:creationId xmlns:a16="http://schemas.microsoft.com/office/drawing/2014/main" id="{7B597073-E1D4-9DB5-0EE7-31312A699E6B}"/>
+            <a:off x="782638" y="3086100"/>
+            <a:ext cx="4432300" cy="1016000"/>
+          </a:xfrm>
+        </p:spPr>
+      </p:pic>
+      <p:sp>
+        <p:nvSpPr>
+          <p:cNvPr id="4" name="Text Placeholder 3">
+            <a:extLst>
+              <a:ext uri="{FF2B5EF4-FFF2-40B4-BE49-F238E27FC236}">
+                <a16:creationId xmlns:a16="http://schemas.microsoft.com/office/drawing/2014/main" id="{6874C6A8-2C9F-92E9-4BB2-93DAF9A633A4}"/>
               </a:ext>
             </a:extLst>
           </p:cNvPr>
@@ -17682,90 +17704,193 @@
             <a:spLocks noGrp="1"/>
           </p:cNvSpPr>
           <p:nvPr>
-            <p:ph idx="1"/>
+            <p:ph type="body" sz="half" idx="2"/>
           </p:nvPr>
         </p:nvSpPr>
-        <p:spPr>
+        <p:spPr/>
+        <p:txBody>
+          <a:bodyPr/>
+          <a:lstStyle/>
+          <a:p>
+            <a:r>
+              <a:rPr lang="en-US"/>
+              <a:t>If you have a lot of files you don’t want git to track, add them to a .gitignore.</a:t>
+            </a:r>
+          </a:p>
+          <a:p>
+            <a:r>
+              <a:rPr lang="en-US"/>
+              <a:t>Put .gitignore at the top level of your repo</a:t>
+            </a:r>
+          </a:p>
+          <a:p>
+            <a:endParaRPr lang="en-US"/>
+          </a:p>
+          <a:p>
+            <a:endParaRPr lang="en-US"/>
+          </a:p>
+          <a:p>
+            <a:endParaRPr lang="en-US"/>
+          </a:p>
+          <a:p>
+            <a:endParaRPr lang="en-US"/>
+          </a:p>
+          <a:p>
+            <a:r>
+              <a:rPr lang="en-US"/>
+              <a:t>What to add?</a:t>
+            </a:r>
+          </a:p>
+          <a:p>
+            <a:r>
+              <a:rPr lang="en-US"/>
+              <a:t>junk files, data directories, binary files, large files, etc. </a:t>
+            </a:r>
+          </a:p>
+        </p:txBody>
+      </p:sp>
+      <p:grpSp>
+        <p:nvGrpSpPr>
+          <p:cNvPr id="9" name="Group 8">
+            <a:extLst>
+              <a:ext uri="{FF2B5EF4-FFF2-40B4-BE49-F238E27FC236}">
+                <a16:creationId xmlns:a16="http://schemas.microsoft.com/office/drawing/2014/main" id="{E234CB3C-6AA9-CCC8-9F95-22D596CFE03C}"/>
+              </a:ext>
+            </a:extLst>
+          </p:cNvPr>
+          <p:cNvGrpSpPr/>
+          <p:nvPr/>
+        </p:nvGrpSpPr>
+        <p:grpSpPr>
           <a:xfrm>
-            <a:off x="4810259" y="649480"/>
-            <a:ext cx="6555347" cy="5546047"/>
-          </a:xfrm>
-        </p:spPr>
-        <p:txBody>
-          <a:bodyPr anchor="ctr">
-            <a:normAutofit/>
-          </a:bodyPr>
-          <a:lstStyle/>
-          <a:p>
-            <a:pPr marL="0" indent="0">
-              <a:buNone/>
-            </a:pPr>
-            <a:r>
-              <a:rPr lang="en-US" sz="2000"/>
-              <a:t>1. </a:t>
-            </a:r>
-            <a:r>
-              <a:rPr lang="en-US" sz="2000" b="1"/>
-              <a:t>Commits are NOT automatic</a:t>
-            </a:r>
-            <a:r>
-              <a:rPr lang="en-US" sz="2000"/>
-              <a:t>. You have to tell git when and what to commit every time. So do it frequently, or you won't be able to go back to a version that you didn't commit. </a:t>
-            </a:r>
-          </a:p>
-          <a:p>
-            <a:pPr marL="0" indent="0">
-              <a:buNone/>
-            </a:pPr>
-            <a:r>
-              <a:rPr lang="en-US" sz="2000"/>
-              <a:t>2. </a:t>
-            </a:r>
-            <a:r>
-              <a:rPr lang="en-US" sz="2000" b="1"/>
-              <a:t>Always pull </a:t>
-            </a:r>
-            <a:r>
-              <a:rPr lang="en-US" sz="2000"/>
-              <a:t>to get the latest changes from the remote before you start working on your local version. Again, git does NOT operate automatically at all. Everything is manual. </a:t>
-            </a:r>
-          </a:p>
-          <a:p>
-            <a:pPr marL="0" indent="0">
-              <a:buNone/>
-            </a:pPr>
-            <a:r>
-              <a:rPr lang="en-US" sz="2000"/>
-              <a:t>3. </a:t>
-            </a:r>
-            <a:r>
-              <a:rPr lang="en-US" sz="2000" b="1"/>
-              <a:t>Always be aware of what you're committing</a:t>
-            </a:r>
-            <a:r>
-              <a:rPr lang="en-US" sz="2000"/>
-              <a:t> as permanently deleting things is annoying</a:t>
-            </a:r>
-          </a:p>
-          <a:p>
-            <a:pPr marL="0" indent="0">
-              <a:buNone/>
-            </a:pPr>
-            <a:r>
-              <a:rPr lang="en-US" sz="2000"/>
-              <a:t>4. Everything is recorded and almost everything can be undone, so </a:t>
-            </a:r>
-            <a:r>
-              <a:rPr lang="en-US" sz="2000" b="1"/>
-              <a:t>don’t be afraid</a:t>
-            </a:r>
-          </a:p>
-        </p:txBody>
-      </p:sp>
+            <a:off x="5832022" y="1573864"/>
+            <a:ext cx="2960914" cy="3710271"/>
+            <a:chOff x="7072993" y="1389199"/>
+            <a:chExt cx="2960914" cy="3710271"/>
+          </a:xfrm>
+        </p:grpSpPr>
+        <p:sp>
+          <p:nvSpPr>
+            <p:cNvPr id="7" name="Internal Storage 6">
+              <a:extLst>
+                <a:ext uri="{FF2B5EF4-FFF2-40B4-BE49-F238E27FC236}">
+                  <a16:creationId xmlns:a16="http://schemas.microsoft.com/office/drawing/2014/main" id="{F409555B-4F95-E732-A42C-9C441298E3A1}"/>
+                </a:ext>
+              </a:extLst>
+            </p:cNvPr>
+            <p:cNvSpPr/>
+            <p:nvPr/>
+          </p:nvSpPr>
+          <p:spPr>
+            <a:xfrm>
+              <a:off x="7072993" y="1758533"/>
+              <a:ext cx="2960914" cy="3340937"/>
+            </a:xfrm>
+            <a:prstGeom prst="flowChartInternalStorage">
+              <a:avLst/>
+            </a:prstGeom>
+          </p:spPr>
+          <p:style>
+            <a:lnRef idx="2">
+              <a:schemeClr val="accent1">
+                <a:shade val="15000"/>
+              </a:schemeClr>
+            </a:lnRef>
+            <a:fillRef idx="1">
+              <a:schemeClr val="accent1"/>
+            </a:fillRef>
+            <a:effectRef idx="0">
+              <a:schemeClr val="accent1"/>
+            </a:effectRef>
+            <a:fontRef idx="minor">
+              <a:schemeClr val="lt1"/>
+            </a:fontRef>
+          </p:style>
+          <p:txBody>
+            <a:bodyPr rtlCol="0" anchor="t"/>
+            <a:lstStyle/>
+            <a:p>
+              <a:r>
+                <a:rPr lang="en-US">
+                  <a:latin typeface="Consolas" panose="020B0609020204030204" pitchFamily="49" charset="0"/>
+                  <a:cs typeface="Consolas" panose="020B0609020204030204" pitchFamily="49" charset="0"/>
+                </a:rPr>
+                <a:t>.DS_Store</a:t>
+              </a:r>
+            </a:p>
+            <a:p>
+              <a:r>
+                <a:rPr lang="en-US">
+                  <a:latin typeface="Consolas" panose="020B0609020204030204" pitchFamily="49" charset="0"/>
+                  <a:cs typeface="Consolas" panose="020B0609020204030204" pitchFamily="49" charset="0"/>
+                </a:rPr>
+                <a:t>data_raw/*</a:t>
+              </a:r>
+            </a:p>
+            <a:p>
+              <a:r>
+                <a:rPr lang="en-US">
+                  <a:latin typeface="Consolas" panose="020B0609020204030204" pitchFamily="49" charset="0"/>
+                  <a:cs typeface="Consolas" panose="020B0609020204030204" pitchFamily="49" charset="0"/>
+                </a:rPr>
+                <a:t>data_processed/*</a:t>
+              </a:r>
+            </a:p>
+            <a:p>
+              <a:r>
+                <a:rPr lang="en-US">
+                  <a:latin typeface="Consolas" panose="020B0609020204030204" pitchFamily="49" charset="0"/>
+                  <a:cs typeface="Consolas" panose="020B0609020204030204" pitchFamily="49" charset="0"/>
+                </a:rPr>
+                <a:t>*.Rproj</a:t>
+              </a:r>
+            </a:p>
+          </p:txBody>
+        </p:sp>
+        <p:sp>
+          <p:nvSpPr>
+            <p:cNvPr id="8" name="TextBox 7">
+              <a:extLst>
+                <a:ext uri="{FF2B5EF4-FFF2-40B4-BE49-F238E27FC236}">
+                  <a16:creationId xmlns:a16="http://schemas.microsoft.com/office/drawing/2014/main" id="{2E0E2C55-2AC8-C754-EAF8-BF44975BE009}"/>
+                </a:ext>
+              </a:extLst>
+            </p:cNvPr>
+            <p:cNvSpPr txBox="1"/>
+            <p:nvPr/>
+          </p:nvSpPr>
+          <p:spPr>
+            <a:xfrm>
+              <a:off x="7072993" y="1389199"/>
+              <a:ext cx="1579278" cy="369332"/>
+            </a:xfrm>
+            <a:prstGeom prst="rect">
+              <a:avLst/>
+            </a:prstGeom>
+            <a:noFill/>
+          </p:spPr>
+          <p:txBody>
+            <a:bodyPr wrap="none" rtlCol="0">
+              <a:spAutoFit/>
+            </a:bodyPr>
+            <a:lstStyle/>
+            <a:p>
+              <a:r>
+                <a:rPr lang="en-US">
+                  <a:latin typeface="Menlo" panose="020B0609030804020204" pitchFamily="49" charset="0"/>
+                  <a:ea typeface="Menlo" panose="020B0609030804020204" pitchFamily="49" charset="0"/>
+                  <a:cs typeface="Menlo" panose="020B0609030804020204" pitchFamily="49" charset="0"/>
+                </a:rPr>
+                <a:t>.gitignore</a:t>
+              </a:r>
+            </a:p>
+          </p:txBody>
+        </p:sp>
+      </p:grpSp>
     </p:spTree>
     <p:extLst>
       <p:ext uri="{BB962C8B-B14F-4D97-AF65-F5344CB8AC3E}">
-        <p14:creationId xmlns:p14="http://schemas.microsoft.com/office/powerpoint/2010/main" val="626042404"/>
+        <p14:creationId xmlns:p14="http://schemas.microsoft.com/office/powerpoint/2010/main" val="2971889554"/>
       </p:ext>
     </p:extLst>
   </p:cSld>
@@ -17794,6 +17919,165 @@
       </p:grpSpPr>
       <p:sp>
         <p:nvSpPr>
+          <p:cNvPr id="2" name="Title 1">
+            <a:extLst>
+              <a:ext uri="{FF2B5EF4-FFF2-40B4-BE49-F238E27FC236}">
+                <a16:creationId xmlns:a16="http://schemas.microsoft.com/office/drawing/2014/main" id="{D1EE486C-FDD0-DC42-D1CA-725C2C3450F5}"/>
+              </a:ext>
+            </a:extLst>
+          </p:cNvPr>
+          <p:cNvSpPr>
+            <a:spLocks noGrp="1"/>
+          </p:cNvSpPr>
+          <p:nvPr>
+            <p:ph type="title"/>
+          </p:nvPr>
+        </p:nvSpPr>
+        <p:spPr>
+          <a:xfrm>
+            <a:off x="466722" y="586855"/>
+            <a:ext cx="3201366" cy="3387497"/>
+          </a:xfrm>
+        </p:spPr>
+        <p:txBody>
+          <a:bodyPr anchor="b">
+            <a:normAutofit/>
+          </a:bodyPr>
+          <a:lstStyle/>
+          <a:p>
+            <a:pPr algn="r"/>
+            <a:r>
+              <a:rPr lang="en-US" sz="4000"/>
+              <a:t>Git takeaways</a:t>
+            </a:r>
+          </a:p>
+        </p:txBody>
+      </p:sp>
+      <p:sp>
+        <p:nvSpPr>
+          <p:cNvPr id="3" name="Content Placeholder 2">
+            <a:extLst>
+              <a:ext uri="{FF2B5EF4-FFF2-40B4-BE49-F238E27FC236}">
+                <a16:creationId xmlns:a16="http://schemas.microsoft.com/office/drawing/2014/main" id="{7B597073-E1D4-9DB5-0EE7-31312A699E6B}"/>
+              </a:ext>
+            </a:extLst>
+          </p:cNvPr>
+          <p:cNvSpPr>
+            <a:spLocks noGrp="1"/>
+          </p:cNvSpPr>
+          <p:nvPr>
+            <p:ph idx="1"/>
+          </p:nvPr>
+        </p:nvSpPr>
+        <p:spPr>
+          <a:xfrm>
+            <a:off x="4810259" y="649480"/>
+            <a:ext cx="6555347" cy="5546047"/>
+          </a:xfrm>
+        </p:spPr>
+        <p:txBody>
+          <a:bodyPr anchor="ctr">
+            <a:normAutofit/>
+          </a:bodyPr>
+          <a:lstStyle/>
+          <a:p>
+            <a:pPr marL="0" indent="0">
+              <a:buNone/>
+            </a:pPr>
+            <a:r>
+              <a:rPr lang="en-US" sz="2000"/>
+              <a:t>1. </a:t>
+            </a:r>
+            <a:r>
+              <a:rPr lang="en-US" sz="2000" b="1"/>
+              <a:t>Commits are NOT automatic</a:t>
+            </a:r>
+            <a:r>
+              <a:rPr lang="en-US" sz="2000"/>
+              <a:t>. You have to tell git when and what to commit every time. So do it frequently, or you won't be able to go back to a version that you didn't commit. </a:t>
+            </a:r>
+          </a:p>
+          <a:p>
+            <a:pPr marL="0" indent="0">
+              <a:buNone/>
+            </a:pPr>
+            <a:r>
+              <a:rPr lang="en-US" sz="2000"/>
+              <a:t>2. </a:t>
+            </a:r>
+            <a:r>
+              <a:rPr lang="en-US" sz="2000" b="1"/>
+              <a:t>Always pull </a:t>
+            </a:r>
+            <a:r>
+              <a:rPr lang="en-US" sz="2000"/>
+              <a:t>to get the latest changes from the remote before you start working on your local version. Again, git does NOT operate automatically at all. Everything is manual. </a:t>
+            </a:r>
+          </a:p>
+          <a:p>
+            <a:pPr marL="0" indent="0">
+              <a:buNone/>
+            </a:pPr>
+            <a:r>
+              <a:rPr lang="en-US" sz="2000"/>
+              <a:t>3. </a:t>
+            </a:r>
+            <a:r>
+              <a:rPr lang="en-US" sz="2000" b="1"/>
+              <a:t>Always be aware of what you're committing</a:t>
+            </a:r>
+            <a:r>
+              <a:rPr lang="en-US" sz="2000"/>
+              <a:t> as permanently deleting things is annoying</a:t>
+            </a:r>
+          </a:p>
+          <a:p>
+            <a:pPr marL="0" indent="0">
+              <a:buNone/>
+            </a:pPr>
+            <a:r>
+              <a:rPr lang="en-US" sz="2000"/>
+              <a:t>4. Everything is recorded and almost everything can be undone, so </a:t>
+            </a:r>
+            <a:r>
+              <a:rPr lang="en-US" sz="2000" b="1"/>
+              <a:t>don’t be afraid</a:t>
+            </a:r>
+          </a:p>
+        </p:txBody>
+      </p:sp>
+    </p:spTree>
+    <p:extLst>
+      <p:ext uri="{BB962C8B-B14F-4D97-AF65-F5344CB8AC3E}">
+        <p14:creationId xmlns:p14="http://schemas.microsoft.com/office/powerpoint/2010/main" val="626042404"/>
+      </p:ext>
+    </p:extLst>
+  </p:cSld>
+  <p:clrMapOvr>
+    <a:masterClrMapping/>
+  </p:clrMapOvr>
+</p:sld>
+</file>
+
+<file path=ppt/slides/slide23.xml><?xml version="1.0" encoding="utf-8"?>
+<p:sld xmlns:a="http://schemas.openxmlformats.org/drawingml/2006/main" xmlns:r="http://schemas.openxmlformats.org/officeDocument/2006/relationships" xmlns:p="http://schemas.openxmlformats.org/presentationml/2006/main">
+  <p:cSld>
+    <p:spTree>
+      <p:nvGrpSpPr>
+        <p:cNvPr id="1" name=""/>
+        <p:cNvGrpSpPr/>
+        <p:nvPr/>
+      </p:nvGrpSpPr>
+      <p:grpSpPr>
+        <a:xfrm>
+          <a:off x="0" y="0"/>
+          <a:ext cx="0" cy="0"/>
+          <a:chOff x="0" y="0"/>
+          <a:chExt cx="0" cy="0"/>
+        </a:xfrm>
+      </p:grpSpPr>
+      <p:sp>
+        <p:nvSpPr>
           <p:cNvPr id="4" name="Title 3">
             <a:extLst>
               <a:ext uri="{FF2B5EF4-FFF2-40B4-BE49-F238E27FC236}">
@@ -17861,7 +18145,7 @@
 </p:sld>
 </file>
 
-<file path=ppt/slides/slide23.xml><?xml version="1.0" encoding="utf-8"?>
+<file path=ppt/slides/slide24.xml><?xml version="1.0" encoding="utf-8"?>
 <p:sld xmlns:a="http://schemas.openxmlformats.org/drawingml/2006/main" xmlns:r="http://schemas.openxmlformats.org/officeDocument/2006/relationships" xmlns:p="http://schemas.openxmlformats.org/presentationml/2006/main">
   <p:cSld>
     <p:spTree>
@@ -18887,7 +19171,7 @@
 </p:sld>
 </file>
 
-<file path=ppt/slides/slide24.xml><?xml version="1.0" encoding="utf-8"?>
+<file path=ppt/slides/slide25.xml><?xml version="1.0" encoding="utf-8"?>
 <p:sld xmlns:a="http://schemas.openxmlformats.org/drawingml/2006/main" xmlns:r="http://schemas.openxmlformats.org/officeDocument/2006/relationships" xmlns:p="http://schemas.openxmlformats.org/presentationml/2006/main">
   <p:cSld>
     <p:spTree>
@@ -19656,7 +19940,7 @@
 </p:sld>
 </file>
 
-<file path=ppt/slides/slide25.xml><?xml version="1.0" encoding="utf-8"?>
+<file path=ppt/slides/slide26.xml><?xml version="1.0" encoding="utf-8"?>
 <p:sld xmlns:a="http://schemas.openxmlformats.org/drawingml/2006/main" xmlns:r="http://schemas.openxmlformats.org/officeDocument/2006/relationships" xmlns:p="http://schemas.openxmlformats.org/presentationml/2006/main">
   <p:cSld>
     <p:spTree>
@@ -20843,7 +21127,7 @@
 </p:sld>
 </file>
 
-<file path=ppt/slides/slide26.xml><?xml version="1.0" encoding="utf-8"?>
+<file path=ppt/slides/slide27.xml><?xml version="1.0" encoding="utf-8"?>
 <p:sld xmlns:a="http://schemas.openxmlformats.org/drawingml/2006/main" xmlns:r="http://schemas.openxmlformats.org/officeDocument/2006/relationships" xmlns:p="http://schemas.openxmlformats.org/presentationml/2006/main">
   <p:cSld>
     <p:spTree>
@@ -22448,7 +22732,7 @@
 </p:sld>
 </file>
 
-<file path=ppt/slides/slide27.xml><?xml version="1.0" encoding="utf-8"?>
+<file path=ppt/slides/slide28.xml><?xml version="1.0" encoding="utf-8"?>
 <p:sld xmlns:a="http://schemas.openxmlformats.org/drawingml/2006/main" xmlns:r="http://schemas.openxmlformats.org/officeDocument/2006/relationships" xmlns:p="http://schemas.openxmlformats.org/presentationml/2006/main">
   <p:cSld>
     <p:spTree>
@@ -23883,7 +24167,7 @@
 </p:sld>
 </file>
 
-<file path=ppt/slides/slide28.xml><?xml version="1.0" encoding="utf-8"?>
+<file path=ppt/slides/slide29.xml><?xml version="1.0" encoding="utf-8"?>
 <p:sld xmlns:a="http://schemas.openxmlformats.org/drawingml/2006/main" xmlns:r="http://schemas.openxmlformats.org/officeDocument/2006/relationships" xmlns:p="http://schemas.openxmlformats.org/presentationml/2006/main">
   <p:cSld>
     <p:spTree>
@@ -25487,1709 +25771,6 @@
     <p:extLst>
       <p:ext uri="{BB962C8B-B14F-4D97-AF65-F5344CB8AC3E}">
         <p14:creationId xmlns:p14="http://schemas.microsoft.com/office/powerpoint/2010/main" val="3896278985"/>
-      </p:ext>
-    </p:extLst>
-  </p:cSld>
-  <p:clrMapOvr>
-    <a:masterClrMapping/>
-  </p:clrMapOvr>
-</p:sld>
-</file>
-
-<file path=ppt/slides/slide29.xml><?xml version="1.0" encoding="utf-8"?>
-<p:sld xmlns:a="http://schemas.openxmlformats.org/drawingml/2006/main" xmlns:r="http://schemas.openxmlformats.org/officeDocument/2006/relationships" xmlns:p="http://schemas.openxmlformats.org/presentationml/2006/main">
-  <p:cSld>
-    <p:spTree>
-      <p:nvGrpSpPr>
-        <p:cNvPr id="1" name="">
-          <a:extLst>
-            <a:ext uri="{FF2B5EF4-FFF2-40B4-BE49-F238E27FC236}">
-              <a16:creationId xmlns:a16="http://schemas.microsoft.com/office/drawing/2014/main" id="{A53094D5-CBCD-8CC5-BCA4-B22C7E0FE60D}"/>
-            </a:ext>
-          </a:extLst>
-        </p:cNvPr>
-        <p:cNvGrpSpPr/>
-        <p:nvPr/>
-      </p:nvGrpSpPr>
-      <p:grpSpPr>
-        <a:xfrm>
-          <a:off x="0" y="0"/>
-          <a:ext cx="0" cy="0"/>
-          <a:chOff x="0" y="0"/>
-          <a:chExt cx="0" cy="0"/>
-        </a:xfrm>
-      </p:grpSpPr>
-      <p:sp>
-        <p:nvSpPr>
-          <p:cNvPr id="2" name="Rectangle 1">
-            <a:extLst>
-              <a:ext uri="{FF2B5EF4-FFF2-40B4-BE49-F238E27FC236}">
-                <a16:creationId xmlns:a16="http://schemas.microsoft.com/office/drawing/2014/main" id="{981430D3-F244-3F17-C558-EF9D83C7EE10}"/>
-              </a:ext>
-            </a:extLst>
-          </p:cNvPr>
-          <p:cNvSpPr/>
-          <p:nvPr/>
-        </p:nvSpPr>
-        <p:spPr>
-          <a:xfrm>
-            <a:off x="7158565" y="3573976"/>
-            <a:ext cx="2062480" cy="3037840"/>
-          </a:xfrm>
-          <a:prstGeom prst="rect">
-            <a:avLst/>
-          </a:prstGeom>
-          <a:solidFill>
-            <a:schemeClr val="bg1"/>
-          </a:solidFill>
-        </p:spPr>
-        <p:style>
-          <a:lnRef idx="2">
-            <a:schemeClr val="accent1">
-              <a:shade val="15000"/>
-            </a:schemeClr>
-          </a:lnRef>
-          <a:fillRef idx="1">
-            <a:schemeClr val="accent1"/>
-          </a:fillRef>
-          <a:effectRef idx="0">
-            <a:schemeClr val="accent1"/>
-          </a:effectRef>
-          <a:fontRef idx="minor">
-            <a:schemeClr val="lt1"/>
-          </a:fontRef>
-        </p:style>
-        <p:txBody>
-          <a:bodyPr rtlCol="0" anchor="ctr"/>
-          <a:lstStyle/>
-          <a:p>
-            <a:pPr algn="ctr"/>
-            <a:endParaRPr lang="en-US"/>
-          </a:p>
-        </p:txBody>
-      </p:sp>
-      <p:sp>
-        <p:nvSpPr>
-          <p:cNvPr id="3" name="Rectangle 2">
-            <a:extLst>
-              <a:ext uri="{FF2B5EF4-FFF2-40B4-BE49-F238E27FC236}">
-                <a16:creationId xmlns:a16="http://schemas.microsoft.com/office/drawing/2014/main" id="{450F0567-832B-74BF-D040-36AF65A9129F}"/>
-              </a:ext>
-            </a:extLst>
-          </p:cNvPr>
-          <p:cNvSpPr/>
-          <p:nvPr/>
-        </p:nvSpPr>
-        <p:spPr>
-          <a:xfrm>
-            <a:off x="3095619" y="3600548"/>
-            <a:ext cx="2062480" cy="3037840"/>
-          </a:xfrm>
-          <a:prstGeom prst="rect">
-            <a:avLst/>
-          </a:prstGeom>
-          <a:solidFill>
-            <a:schemeClr val="bg1"/>
-          </a:solidFill>
-        </p:spPr>
-        <p:style>
-          <a:lnRef idx="2">
-            <a:schemeClr val="accent1">
-              <a:shade val="15000"/>
-            </a:schemeClr>
-          </a:lnRef>
-          <a:fillRef idx="1">
-            <a:schemeClr val="accent1"/>
-          </a:fillRef>
-          <a:effectRef idx="0">
-            <a:schemeClr val="accent1"/>
-          </a:effectRef>
-          <a:fontRef idx="minor">
-            <a:schemeClr val="lt1"/>
-          </a:fontRef>
-        </p:style>
-        <p:txBody>
-          <a:bodyPr rtlCol="0" anchor="ctr"/>
-          <a:lstStyle/>
-          <a:p>
-            <a:pPr algn="ctr"/>
-            <a:endParaRPr lang="en-US"/>
-          </a:p>
-        </p:txBody>
-      </p:sp>
-      <p:sp>
-        <p:nvSpPr>
-          <p:cNvPr id="4" name="Rectangle 3">
-            <a:extLst>
-              <a:ext uri="{FF2B5EF4-FFF2-40B4-BE49-F238E27FC236}">
-                <a16:creationId xmlns:a16="http://schemas.microsoft.com/office/drawing/2014/main" id="{72E2869F-DAA8-42DC-4DB3-60EC3AC84EDF}"/>
-              </a:ext>
-            </a:extLst>
-          </p:cNvPr>
-          <p:cNvSpPr/>
-          <p:nvPr/>
-        </p:nvSpPr>
-        <p:spPr>
-          <a:xfrm>
-            <a:off x="2210651" y="468118"/>
-            <a:ext cx="2062480" cy="2482948"/>
-          </a:xfrm>
-          <a:prstGeom prst="rect">
-            <a:avLst/>
-          </a:prstGeom>
-          <a:solidFill>
-            <a:schemeClr val="bg1"/>
-          </a:solidFill>
-        </p:spPr>
-        <p:style>
-          <a:lnRef idx="2">
-            <a:schemeClr val="accent1">
-              <a:shade val="15000"/>
-            </a:schemeClr>
-          </a:lnRef>
-          <a:fillRef idx="1">
-            <a:schemeClr val="accent1"/>
-          </a:fillRef>
-          <a:effectRef idx="0">
-            <a:schemeClr val="accent1"/>
-          </a:effectRef>
-          <a:fontRef idx="minor">
-            <a:schemeClr val="lt1"/>
-          </a:fontRef>
-        </p:style>
-        <p:txBody>
-          <a:bodyPr rtlCol="0" anchor="ctr"/>
-          <a:lstStyle/>
-          <a:p>
-            <a:pPr algn="ctr"/>
-            <a:endParaRPr lang="en-US"/>
-          </a:p>
-        </p:txBody>
-      </p:sp>
-      <p:sp>
-        <p:nvSpPr>
-          <p:cNvPr id="5" name="Rectangle 4">
-            <a:extLst>
-              <a:ext uri="{FF2B5EF4-FFF2-40B4-BE49-F238E27FC236}">
-                <a16:creationId xmlns:a16="http://schemas.microsoft.com/office/drawing/2014/main" id="{E0996AE5-9C92-DBD3-95D2-4E5F307EB719}"/>
-              </a:ext>
-            </a:extLst>
-          </p:cNvPr>
-          <p:cNvSpPr/>
-          <p:nvPr/>
-        </p:nvSpPr>
-        <p:spPr>
-          <a:xfrm>
-            <a:off x="5064760" y="467360"/>
-            <a:ext cx="2062480" cy="2612348"/>
-          </a:xfrm>
-          <a:prstGeom prst="rect">
-            <a:avLst/>
-          </a:prstGeom>
-          <a:solidFill>
-            <a:schemeClr val="bg1"/>
-          </a:solidFill>
-        </p:spPr>
-        <p:style>
-          <a:lnRef idx="2">
-            <a:schemeClr val="accent1">
-              <a:shade val="15000"/>
-            </a:schemeClr>
-          </a:lnRef>
-          <a:fillRef idx="1">
-            <a:schemeClr val="accent1"/>
-          </a:fillRef>
-          <a:effectRef idx="0">
-            <a:schemeClr val="accent1"/>
-          </a:effectRef>
-          <a:fontRef idx="minor">
-            <a:schemeClr val="lt1"/>
-          </a:fontRef>
-        </p:style>
-        <p:txBody>
-          <a:bodyPr rtlCol="0" anchor="ctr"/>
-          <a:lstStyle/>
-          <a:p>
-            <a:pPr algn="ctr"/>
-            <a:endParaRPr lang="en-US"/>
-          </a:p>
-        </p:txBody>
-      </p:sp>
-      <p:sp>
-        <p:nvSpPr>
-          <p:cNvPr id="6" name="Rectangle 5">
-            <a:extLst>
-              <a:ext uri="{FF2B5EF4-FFF2-40B4-BE49-F238E27FC236}">
-                <a16:creationId xmlns:a16="http://schemas.microsoft.com/office/drawing/2014/main" id="{BF4066DC-A892-6F9F-AE9D-D28AD3DF4DF0}"/>
-              </a:ext>
-            </a:extLst>
-          </p:cNvPr>
-          <p:cNvSpPr/>
-          <p:nvPr/>
-        </p:nvSpPr>
-        <p:spPr>
-          <a:xfrm>
-            <a:off x="7361765" y="4620624"/>
-            <a:ext cx="1656080" cy="2005818"/>
-          </a:xfrm>
-          <a:prstGeom prst="rect">
-            <a:avLst/>
-          </a:prstGeom>
-          <a:solidFill>
-            <a:schemeClr val="accent3">
-              <a:lumMod val="40000"/>
-              <a:lumOff val="60000"/>
-            </a:schemeClr>
-          </a:solidFill>
-          <a:ln>
-            <a:solidFill>
-              <a:schemeClr val="tx1"/>
-            </a:solidFill>
-          </a:ln>
-        </p:spPr>
-        <p:style>
-          <a:lnRef idx="2">
-            <a:schemeClr val="accent1"/>
-          </a:lnRef>
-          <a:fillRef idx="1">
-            <a:schemeClr val="lt1"/>
-          </a:fillRef>
-          <a:effectRef idx="0">
-            <a:schemeClr val="accent1"/>
-          </a:effectRef>
-          <a:fontRef idx="minor">
-            <a:schemeClr val="dk1"/>
-          </a:fontRef>
-        </p:style>
-        <p:txBody>
-          <a:bodyPr rtlCol="0" anchor="t"/>
-          <a:lstStyle/>
-          <a:p>
-            <a:pPr algn="ctr"/>
-            <a:r>
-              <a:rPr lang="en-US" sz="1600" dirty="0"/>
-              <a:t>Version DB</a:t>
-            </a:r>
-          </a:p>
-        </p:txBody>
-      </p:sp>
-      <p:sp>
-        <p:nvSpPr>
-          <p:cNvPr id="7" name="Rectangle 6">
-            <a:extLst>
-              <a:ext uri="{FF2B5EF4-FFF2-40B4-BE49-F238E27FC236}">
-                <a16:creationId xmlns:a16="http://schemas.microsoft.com/office/drawing/2014/main" id="{66FBF893-A7D2-8F47-096F-F72CBD9A54EC}"/>
-              </a:ext>
-            </a:extLst>
-          </p:cNvPr>
-          <p:cNvSpPr/>
-          <p:nvPr/>
-        </p:nvSpPr>
-        <p:spPr>
-          <a:xfrm>
-            <a:off x="2418931" y="1185499"/>
-            <a:ext cx="1656080" cy="1724499"/>
-          </a:xfrm>
-          <a:prstGeom prst="rect">
-            <a:avLst/>
-          </a:prstGeom>
-          <a:solidFill>
-            <a:schemeClr val="accent3">
-              <a:lumMod val="40000"/>
-              <a:lumOff val="60000"/>
-            </a:schemeClr>
-          </a:solidFill>
-          <a:ln>
-            <a:solidFill>
-              <a:schemeClr val="tx1"/>
-            </a:solidFill>
-          </a:ln>
-        </p:spPr>
-        <p:style>
-          <a:lnRef idx="2">
-            <a:schemeClr val="accent1"/>
-          </a:lnRef>
-          <a:fillRef idx="1">
-            <a:schemeClr val="lt1"/>
-          </a:fillRef>
-          <a:effectRef idx="0">
-            <a:schemeClr val="accent1"/>
-          </a:effectRef>
-          <a:fontRef idx="minor">
-            <a:schemeClr val="dk1"/>
-          </a:fontRef>
-        </p:style>
-        <p:txBody>
-          <a:bodyPr rtlCol="0" anchor="t"/>
-          <a:lstStyle/>
-          <a:p>
-            <a:pPr algn="ctr"/>
-            <a:r>
-              <a:rPr lang="en-US" sz="1600" dirty="0"/>
-              <a:t>Version DB</a:t>
-            </a:r>
-          </a:p>
-        </p:txBody>
-      </p:sp>
-      <p:sp>
-        <p:nvSpPr>
-          <p:cNvPr id="8" name="Rectangle 7">
-            <a:extLst>
-              <a:ext uri="{FF2B5EF4-FFF2-40B4-BE49-F238E27FC236}">
-                <a16:creationId xmlns:a16="http://schemas.microsoft.com/office/drawing/2014/main" id="{E980AAA2-5F10-F979-3229-DD5D70651A37}"/>
-              </a:ext>
-            </a:extLst>
-          </p:cNvPr>
-          <p:cNvSpPr/>
-          <p:nvPr/>
-        </p:nvSpPr>
-        <p:spPr>
-          <a:xfrm>
-            <a:off x="3318930" y="4620624"/>
-            <a:ext cx="1656080" cy="1991191"/>
-          </a:xfrm>
-          <a:prstGeom prst="rect">
-            <a:avLst/>
-          </a:prstGeom>
-          <a:solidFill>
-            <a:schemeClr val="accent3">
-              <a:lumMod val="40000"/>
-              <a:lumOff val="60000"/>
-            </a:schemeClr>
-          </a:solidFill>
-          <a:ln>
-            <a:solidFill>
-              <a:schemeClr val="tx1"/>
-            </a:solidFill>
-          </a:ln>
-        </p:spPr>
-        <p:style>
-          <a:lnRef idx="2">
-            <a:schemeClr val="accent1"/>
-          </a:lnRef>
-          <a:fillRef idx="1">
-            <a:schemeClr val="lt1"/>
-          </a:fillRef>
-          <a:effectRef idx="0">
-            <a:schemeClr val="accent1"/>
-          </a:effectRef>
-          <a:fontRef idx="minor">
-            <a:schemeClr val="dk1"/>
-          </a:fontRef>
-        </p:style>
-        <p:txBody>
-          <a:bodyPr rtlCol="0" anchor="t"/>
-          <a:lstStyle/>
-          <a:p>
-            <a:pPr algn="ctr"/>
-            <a:r>
-              <a:rPr lang="en-US" sz="1600" dirty="0"/>
-              <a:t>Version DB</a:t>
-            </a:r>
-          </a:p>
-        </p:txBody>
-      </p:sp>
-      <p:sp>
-        <p:nvSpPr>
-          <p:cNvPr id="9" name="Rectangle 8">
-            <a:extLst>
-              <a:ext uri="{FF2B5EF4-FFF2-40B4-BE49-F238E27FC236}">
-                <a16:creationId xmlns:a16="http://schemas.microsoft.com/office/drawing/2014/main" id="{5067553A-E849-805A-4121-ABA23483A39C}"/>
-              </a:ext>
-            </a:extLst>
-          </p:cNvPr>
-          <p:cNvSpPr/>
-          <p:nvPr/>
-        </p:nvSpPr>
-        <p:spPr>
-          <a:xfrm>
-            <a:off x="5267960" y="1176944"/>
-            <a:ext cx="1656080" cy="1853700"/>
-          </a:xfrm>
-          <a:prstGeom prst="rect">
-            <a:avLst/>
-          </a:prstGeom>
-          <a:solidFill>
-            <a:schemeClr val="accent3">
-              <a:lumMod val="40000"/>
-              <a:lumOff val="60000"/>
-            </a:schemeClr>
-          </a:solidFill>
-          <a:ln>
-            <a:solidFill>
-              <a:schemeClr val="tx1"/>
-            </a:solidFill>
-          </a:ln>
-        </p:spPr>
-        <p:style>
-          <a:lnRef idx="2">
-            <a:schemeClr val="accent1"/>
-          </a:lnRef>
-          <a:fillRef idx="1">
-            <a:schemeClr val="lt1"/>
-          </a:fillRef>
-          <a:effectRef idx="0">
-            <a:schemeClr val="accent1"/>
-          </a:effectRef>
-          <a:fontRef idx="minor">
-            <a:schemeClr val="dk1"/>
-          </a:fontRef>
-        </p:style>
-        <p:txBody>
-          <a:bodyPr rtlCol="0" anchor="t"/>
-          <a:lstStyle/>
-          <a:p>
-            <a:pPr algn="ctr"/>
-            <a:r>
-              <a:rPr lang="en-US" sz="1600" dirty="0"/>
-              <a:t>Version DB</a:t>
-            </a:r>
-          </a:p>
-        </p:txBody>
-      </p:sp>
-      <p:sp>
-        <p:nvSpPr>
-          <p:cNvPr id="10" name="Terminator 9">
-            <a:extLst>
-              <a:ext uri="{FF2B5EF4-FFF2-40B4-BE49-F238E27FC236}">
-                <a16:creationId xmlns:a16="http://schemas.microsoft.com/office/drawing/2014/main" id="{1FC938A9-8A73-1FB9-2D98-C421DD9ABF27}"/>
-              </a:ext>
-            </a:extLst>
-          </p:cNvPr>
-          <p:cNvSpPr/>
-          <p:nvPr/>
-        </p:nvSpPr>
-        <p:spPr>
-          <a:xfrm>
-            <a:off x="3400419" y="6120228"/>
-            <a:ext cx="1452880" cy="396240"/>
-          </a:xfrm>
-          <a:prstGeom prst="flowChartTerminator">
-            <a:avLst/>
-          </a:prstGeom>
-        </p:spPr>
-        <p:style>
-          <a:lnRef idx="2">
-            <a:schemeClr val="accent1">
-              <a:shade val="15000"/>
-            </a:schemeClr>
-          </a:lnRef>
-          <a:fillRef idx="1">
-            <a:schemeClr val="accent1"/>
-          </a:fillRef>
-          <a:effectRef idx="0">
-            <a:schemeClr val="accent1"/>
-          </a:effectRef>
-          <a:fontRef idx="minor">
-            <a:schemeClr val="lt1"/>
-          </a:fontRef>
-        </p:style>
-        <p:txBody>
-          <a:bodyPr rtlCol="0" anchor="ctr"/>
-          <a:lstStyle/>
-          <a:p>
-            <a:pPr algn="ctr"/>
-            <a:r>
-              <a:rPr lang="en-US" dirty="0"/>
-              <a:t>Commit 1</a:t>
-            </a:r>
-          </a:p>
-        </p:txBody>
-      </p:sp>
-      <p:sp>
-        <p:nvSpPr>
-          <p:cNvPr id="11" name="Terminator 10">
-            <a:extLst>
-              <a:ext uri="{FF2B5EF4-FFF2-40B4-BE49-F238E27FC236}">
-                <a16:creationId xmlns:a16="http://schemas.microsoft.com/office/drawing/2014/main" id="{3A34AF48-7B63-ED55-4D85-62FC9F3DFD97}"/>
-              </a:ext>
-            </a:extLst>
-          </p:cNvPr>
-          <p:cNvSpPr/>
-          <p:nvPr/>
-        </p:nvSpPr>
-        <p:spPr>
-          <a:xfrm>
-            <a:off x="3400419" y="5581748"/>
-            <a:ext cx="1452880" cy="396240"/>
-          </a:xfrm>
-          <a:prstGeom prst="flowChartTerminator">
-            <a:avLst/>
-          </a:prstGeom>
-        </p:spPr>
-        <p:style>
-          <a:lnRef idx="2">
-            <a:schemeClr val="accent1">
-              <a:shade val="15000"/>
-            </a:schemeClr>
-          </a:lnRef>
-          <a:fillRef idx="1">
-            <a:schemeClr val="accent1"/>
-          </a:fillRef>
-          <a:effectRef idx="0">
-            <a:schemeClr val="accent1"/>
-          </a:effectRef>
-          <a:fontRef idx="minor">
-            <a:schemeClr val="lt1"/>
-          </a:fontRef>
-        </p:style>
-        <p:txBody>
-          <a:bodyPr rtlCol="0" anchor="ctr"/>
-          <a:lstStyle/>
-          <a:p>
-            <a:pPr algn="ctr"/>
-            <a:r>
-              <a:rPr lang="en-US" dirty="0"/>
-              <a:t>Commit 2</a:t>
-            </a:r>
-          </a:p>
-        </p:txBody>
-      </p:sp>
-      <p:sp>
-        <p:nvSpPr>
-          <p:cNvPr id="12" name="Terminator 11">
-            <a:extLst>
-              <a:ext uri="{FF2B5EF4-FFF2-40B4-BE49-F238E27FC236}">
-                <a16:creationId xmlns:a16="http://schemas.microsoft.com/office/drawing/2014/main" id="{9A66AF4C-7C8B-37B9-9841-170A6342BE0A}"/>
-              </a:ext>
-            </a:extLst>
-          </p:cNvPr>
-          <p:cNvSpPr/>
-          <p:nvPr/>
-        </p:nvSpPr>
-        <p:spPr>
-          <a:xfrm>
-            <a:off x="3400419" y="5043268"/>
-            <a:ext cx="1452880" cy="396240"/>
-          </a:xfrm>
-          <a:prstGeom prst="flowChartTerminator">
-            <a:avLst/>
-          </a:prstGeom>
-        </p:spPr>
-        <p:style>
-          <a:lnRef idx="2">
-            <a:schemeClr val="accent2">
-              <a:shade val="15000"/>
-            </a:schemeClr>
-          </a:lnRef>
-          <a:fillRef idx="1">
-            <a:schemeClr val="accent2"/>
-          </a:fillRef>
-          <a:effectRef idx="0">
-            <a:schemeClr val="accent2"/>
-          </a:effectRef>
-          <a:fontRef idx="minor">
-            <a:schemeClr val="lt1"/>
-          </a:fontRef>
-        </p:style>
-        <p:txBody>
-          <a:bodyPr rtlCol="0" anchor="ctr"/>
-          <a:lstStyle/>
-          <a:p>
-            <a:pPr algn="ctr"/>
-            <a:r>
-              <a:rPr lang="en-US" dirty="0"/>
-              <a:t>Commit 3</a:t>
-            </a:r>
-          </a:p>
-        </p:txBody>
-      </p:sp>
-      <p:cxnSp>
-        <p:nvCxnSpPr>
-          <p:cNvPr id="13" name="Straight Connector 12">
-            <a:extLst>
-              <a:ext uri="{FF2B5EF4-FFF2-40B4-BE49-F238E27FC236}">
-                <a16:creationId xmlns:a16="http://schemas.microsoft.com/office/drawing/2014/main" id="{2286E039-02CE-4E81-1E7A-DE691EE8D675}"/>
-              </a:ext>
-            </a:extLst>
-          </p:cNvPr>
-          <p:cNvCxnSpPr>
-            <a:cxnSpLocks/>
-            <a:stCxn id="12" idx="2"/>
-            <a:endCxn id="11" idx="0"/>
-          </p:cNvCxnSpPr>
-          <p:nvPr/>
-        </p:nvCxnSpPr>
-        <p:spPr>
-          <a:xfrm>
-            <a:off x="4126859" y="5439508"/>
-            <a:ext cx="0" cy="146304"/>
-          </a:xfrm>
-          <a:prstGeom prst="line">
-            <a:avLst/>
-          </a:prstGeom>
-          <a:ln w="19050"/>
-        </p:spPr>
-        <p:style>
-          <a:lnRef idx="1">
-            <a:schemeClr val="accent1"/>
-          </a:lnRef>
-          <a:fillRef idx="0">
-            <a:schemeClr val="accent1"/>
-          </a:fillRef>
-          <a:effectRef idx="0">
-            <a:schemeClr val="accent1"/>
-          </a:effectRef>
-          <a:fontRef idx="minor">
-            <a:schemeClr val="tx1"/>
-          </a:fontRef>
-        </p:style>
-      </p:cxnSp>
-      <p:cxnSp>
-        <p:nvCxnSpPr>
-          <p:cNvPr id="14" name="Straight Connector 13">
-            <a:extLst>
-              <a:ext uri="{FF2B5EF4-FFF2-40B4-BE49-F238E27FC236}">
-                <a16:creationId xmlns:a16="http://schemas.microsoft.com/office/drawing/2014/main" id="{BF9A3126-CB45-E876-51AE-0791B83AD12D}"/>
-              </a:ext>
-            </a:extLst>
-          </p:cNvPr>
-          <p:cNvCxnSpPr>
-            <a:cxnSpLocks/>
-            <a:stCxn id="10" idx="0"/>
-            <a:endCxn id="11" idx="2"/>
-          </p:cNvCxnSpPr>
-          <p:nvPr/>
-        </p:nvCxnSpPr>
-        <p:spPr>
-          <a:xfrm flipV="1">
-            <a:off x="4126859" y="5977988"/>
-            <a:ext cx="0" cy="146304"/>
-          </a:xfrm>
-          <a:prstGeom prst="line">
-            <a:avLst/>
-          </a:prstGeom>
-          <a:ln w="19050"/>
-        </p:spPr>
-        <p:style>
-          <a:lnRef idx="1">
-            <a:schemeClr val="accent1"/>
-          </a:lnRef>
-          <a:fillRef idx="0">
-            <a:schemeClr val="accent1"/>
-          </a:fillRef>
-          <a:effectRef idx="0">
-            <a:schemeClr val="accent1"/>
-          </a:effectRef>
-          <a:fontRef idx="minor">
-            <a:schemeClr val="tx1"/>
-          </a:fontRef>
-        </p:style>
-      </p:cxnSp>
-      <p:sp>
-        <p:nvSpPr>
-          <p:cNvPr id="15" name="TextBox 14">
-            <a:extLst>
-              <a:ext uri="{FF2B5EF4-FFF2-40B4-BE49-F238E27FC236}">
-                <a16:creationId xmlns:a16="http://schemas.microsoft.com/office/drawing/2014/main" id="{00398AAD-3EAB-01E8-7026-677B9D002CB9}"/>
-              </a:ext>
-            </a:extLst>
-          </p:cNvPr>
-          <p:cNvSpPr txBox="1"/>
-          <p:nvPr/>
-        </p:nvSpPr>
-        <p:spPr>
-          <a:xfrm>
-            <a:off x="3135177" y="3600548"/>
-            <a:ext cx="1983363" cy="369332"/>
-          </a:xfrm>
-          <a:prstGeom prst="rect">
-            <a:avLst/>
-          </a:prstGeom>
-          <a:noFill/>
-        </p:spPr>
-        <p:txBody>
-          <a:bodyPr wrap="none" rtlCol="0">
-            <a:spAutoFit/>
-          </a:bodyPr>
-          <a:lstStyle/>
-          <a:p>
-            <a:r>
-              <a:rPr lang="en-US" dirty="0"/>
-              <a:t>Personal Computer</a:t>
-            </a:r>
-          </a:p>
-        </p:txBody>
-      </p:sp>
-      <p:sp>
-        <p:nvSpPr>
-          <p:cNvPr id="16" name="Terminator 15">
-            <a:extLst>
-              <a:ext uri="{FF2B5EF4-FFF2-40B4-BE49-F238E27FC236}">
-                <a16:creationId xmlns:a16="http://schemas.microsoft.com/office/drawing/2014/main" id="{47E0552E-1644-41EC-2F3D-F304A935EB02}"/>
-              </a:ext>
-            </a:extLst>
-          </p:cNvPr>
-          <p:cNvSpPr/>
-          <p:nvPr/>
-        </p:nvSpPr>
-        <p:spPr>
-          <a:xfrm>
-            <a:off x="7463365" y="6093656"/>
-            <a:ext cx="1452880" cy="396240"/>
-          </a:xfrm>
-          <a:prstGeom prst="flowChartTerminator">
-            <a:avLst/>
-          </a:prstGeom>
-        </p:spPr>
-        <p:style>
-          <a:lnRef idx="2">
-            <a:schemeClr val="accent1">
-              <a:shade val="15000"/>
-            </a:schemeClr>
-          </a:lnRef>
-          <a:fillRef idx="1">
-            <a:schemeClr val="accent1"/>
-          </a:fillRef>
-          <a:effectRef idx="0">
-            <a:schemeClr val="accent1"/>
-          </a:effectRef>
-          <a:fontRef idx="minor">
-            <a:schemeClr val="lt1"/>
-          </a:fontRef>
-        </p:style>
-        <p:txBody>
-          <a:bodyPr rtlCol="0" anchor="ctr"/>
-          <a:lstStyle/>
-          <a:p>
-            <a:pPr algn="ctr"/>
-            <a:r>
-              <a:rPr lang="en-US" dirty="0"/>
-              <a:t>Commit 1</a:t>
-            </a:r>
-          </a:p>
-        </p:txBody>
-      </p:sp>
-      <p:sp>
-        <p:nvSpPr>
-          <p:cNvPr id="17" name="Terminator 16">
-            <a:extLst>
-              <a:ext uri="{FF2B5EF4-FFF2-40B4-BE49-F238E27FC236}">
-                <a16:creationId xmlns:a16="http://schemas.microsoft.com/office/drawing/2014/main" id="{805C3988-E51F-F300-E418-294D323DE490}"/>
-              </a:ext>
-            </a:extLst>
-          </p:cNvPr>
-          <p:cNvSpPr/>
-          <p:nvPr/>
-        </p:nvSpPr>
-        <p:spPr>
-          <a:xfrm>
-            <a:off x="7463365" y="5555176"/>
-            <a:ext cx="1452880" cy="396240"/>
-          </a:xfrm>
-          <a:prstGeom prst="flowChartTerminator">
-            <a:avLst/>
-          </a:prstGeom>
-        </p:spPr>
-        <p:style>
-          <a:lnRef idx="2">
-            <a:schemeClr val="accent1">
-              <a:shade val="15000"/>
-            </a:schemeClr>
-          </a:lnRef>
-          <a:fillRef idx="1">
-            <a:schemeClr val="accent1"/>
-          </a:fillRef>
-          <a:effectRef idx="0">
-            <a:schemeClr val="accent1"/>
-          </a:effectRef>
-          <a:fontRef idx="minor">
-            <a:schemeClr val="lt1"/>
-          </a:fontRef>
-        </p:style>
-        <p:txBody>
-          <a:bodyPr rtlCol="0" anchor="ctr"/>
-          <a:lstStyle/>
-          <a:p>
-            <a:pPr algn="ctr"/>
-            <a:r>
-              <a:rPr lang="en-US" dirty="0"/>
-              <a:t>Commit 2</a:t>
-            </a:r>
-          </a:p>
-        </p:txBody>
-      </p:sp>
-      <p:sp>
-        <p:nvSpPr>
-          <p:cNvPr id="18" name="Terminator 17">
-            <a:extLst>
-              <a:ext uri="{FF2B5EF4-FFF2-40B4-BE49-F238E27FC236}">
-                <a16:creationId xmlns:a16="http://schemas.microsoft.com/office/drawing/2014/main" id="{FC3C1BA5-AE1B-6B73-9822-6D5CF1391A57}"/>
-              </a:ext>
-            </a:extLst>
-          </p:cNvPr>
-          <p:cNvSpPr/>
-          <p:nvPr/>
-        </p:nvSpPr>
-        <p:spPr>
-          <a:xfrm>
-            <a:off x="7463365" y="5016696"/>
-            <a:ext cx="1452880" cy="396240"/>
-          </a:xfrm>
-          <a:prstGeom prst="flowChartTerminator">
-            <a:avLst/>
-          </a:prstGeom>
-        </p:spPr>
-        <p:style>
-          <a:lnRef idx="2">
-            <a:schemeClr val="accent2">
-              <a:shade val="15000"/>
-            </a:schemeClr>
-          </a:lnRef>
-          <a:fillRef idx="1">
-            <a:schemeClr val="accent2"/>
-          </a:fillRef>
-          <a:effectRef idx="0">
-            <a:schemeClr val="accent2"/>
-          </a:effectRef>
-          <a:fontRef idx="minor">
-            <a:schemeClr val="lt1"/>
-          </a:fontRef>
-        </p:style>
-        <p:txBody>
-          <a:bodyPr rtlCol="0" anchor="ctr"/>
-          <a:lstStyle/>
-          <a:p>
-            <a:pPr algn="ctr"/>
-            <a:r>
-              <a:rPr lang="en-US" dirty="0"/>
-              <a:t>Commit 3</a:t>
-            </a:r>
-          </a:p>
-        </p:txBody>
-      </p:sp>
-      <p:cxnSp>
-        <p:nvCxnSpPr>
-          <p:cNvPr id="19" name="Straight Connector 18">
-            <a:extLst>
-              <a:ext uri="{FF2B5EF4-FFF2-40B4-BE49-F238E27FC236}">
-                <a16:creationId xmlns:a16="http://schemas.microsoft.com/office/drawing/2014/main" id="{638CD68D-F821-069C-6116-84B24C16750E}"/>
-              </a:ext>
-            </a:extLst>
-          </p:cNvPr>
-          <p:cNvCxnSpPr>
-            <a:cxnSpLocks/>
-            <a:stCxn id="18" idx="2"/>
-            <a:endCxn id="17" idx="0"/>
-          </p:cNvCxnSpPr>
-          <p:nvPr/>
-        </p:nvCxnSpPr>
-        <p:spPr>
-          <a:xfrm>
-            <a:off x="8189805" y="5412936"/>
-            <a:ext cx="0" cy="146304"/>
-          </a:xfrm>
-          <a:prstGeom prst="line">
-            <a:avLst/>
-          </a:prstGeom>
-          <a:ln w="19050"/>
-        </p:spPr>
-        <p:style>
-          <a:lnRef idx="1">
-            <a:schemeClr val="accent1"/>
-          </a:lnRef>
-          <a:fillRef idx="0">
-            <a:schemeClr val="accent1"/>
-          </a:fillRef>
-          <a:effectRef idx="0">
-            <a:schemeClr val="accent1"/>
-          </a:effectRef>
-          <a:fontRef idx="minor">
-            <a:schemeClr val="tx1"/>
-          </a:fontRef>
-        </p:style>
-      </p:cxnSp>
-      <p:cxnSp>
-        <p:nvCxnSpPr>
-          <p:cNvPr id="20" name="Straight Connector 19">
-            <a:extLst>
-              <a:ext uri="{FF2B5EF4-FFF2-40B4-BE49-F238E27FC236}">
-                <a16:creationId xmlns:a16="http://schemas.microsoft.com/office/drawing/2014/main" id="{0B3B599A-50AA-454F-98E8-D81E4255451A}"/>
-              </a:ext>
-            </a:extLst>
-          </p:cNvPr>
-          <p:cNvCxnSpPr>
-            <a:cxnSpLocks/>
-            <a:stCxn id="16" idx="0"/>
-            <a:endCxn id="17" idx="2"/>
-          </p:cNvCxnSpPr>
-          <p:nvPr/>
-        </p:nvCxnSpPr>
-        <p:spPr>
-          <a:xfrm flipV="1">
-            <a:off x="8189805" y="5951416"/>
-            <a:ext cx="0" cy="146304"/>
-          </a:xfrm>
-          <a:prstGeom prst="line">
-            <a:avLst/>
-          </a:prstGeom>
-          <a:ln w="19050"/>
-        </p:spPr>
-        <p:style>
-          <a:lnRef idx="1">
-            <a:schemeClr val="accent1"/>
-          </a:lnRef>
-          <a:fillRef idx="0">
-            <a:schemeClr val="accent1"/>
-          </a:fillRef>
-          <a:effectRef idx="0">
-            <a:schemeClr val="accent1"/>
-          </a:effectRef>
-          <a:fontRef idx="minor">
-            <a:schemeClr val="tx1"/>
-          </a:fontRef>
-        </p:style>
-      </p:cxnSp>
-      <p:sp>
-        <p:nvSpPr>
-          <p:cNvPr id="21" name="TextBox 20">
-            <a:extLst>
-              <a:ext uri="{FF2B5EF4-FFF2-40B4-BE49-F238E27FC236}">
-                <a16:creationId xmlns:a16="http://schemas.microsoft.com/office/drawing/2014/main" id="{95D88EC0-52AB-8E87-BA30-F5EB91497F2C}"/>
-              </a:ext>
-            </a:extLst>
-          </p:cNvPr>
-          <p:cNvSpPr txBox="1"/>
-          <p:nvPr/>
-        </p:nvSpPr>
-        <p:spPr>
-          <a:xfrm>
-            <a:off x="7271701" y="3573976"/>
-            <a:ext cx="1836208" cy="369332"/>
-          </a:xfrm>
-          <a:prstGeom prst="rect">
-            <a:avLst/>
-          </a:prstGeom>
-          <a:noFill/>
-        </p:spPr>
-        <p:txBody>
-          <a:bodyPr wrap="none" rtlCol="0">
-            <a:spAutoFit/>
-          </a:bodyPr>
-          <a:lstStyle/>
-          <a:p>
-            <a:r>
-              <a:rPr lang="en-US" dirty="0"/>
-              <a:t>Cluster Computer</a:t>
-            </a:r>
-          </a:p>
-        </p:txBody>
-      </p:sp>
-      <p:sp>
-        <p:nvSpPr>
-          <p:cNvPr id="22" name="Terminator 21">
-            <a:extLst>
-              <a:ext uri="{FF2B5EF4-FFF2-40B4-BE49-F238E27FC236}">
-                <a16:creationId xmlns:a16="http://schemas.microsoft.com/office/drawing/2014/main" id="{364AB25F-DF34-8005-2858-8B425138C74C}"/>
-              </a:ext>
-            </a:extLst>
-          </p:cNvPr>
-          <p:cNvSpPr/>
-          <p:nvPr/>
-        </p:nvSpPr>
-        <p:spPr>
-          <a:xfrm>
-            <a:off x="5389671" y="2577664"/>
-            <a:ext cx="1452880" cy="396240"/>
-          </a:xfrm>
-          <a:prstGeom prst="flowChartTerminator">
-            <a:avLst/>
-          </a:prstGeom>
-        </p:spPr>
-        <p:style>
-          <a:lnRef idx="2">
-            <a:schemeClr val="accent1">
-              <a:shade val="15000"/>
-            </a:schemeClr>
-          </a:lnRef>
-          <a:fillRef idx="1">
-            <a:schemeClr val="accent1"/>
-          </a:fillRef>
-          <a:effectRef idx="0">
-            <a:schemeClr val="accent1"/>
-          </a:effectRef>
-          <a:fontRef idx="minor">
-            <a:schemeClr val="lt1"/>
-          </a:fontRef>
-        </p:style>
-        <p:txBody>
-          <a:bodyPr rtlCol="0" anchor="ctr"/>
-          <a:lstStyle/>
-          <a:p>
-            <a:pPr algn="ctr"/>
-            <a:r>
-              <a:rPr lang="en-US" dirty="0"/>
-              <a:t>Commit 1</a:t>
-            </a:r>
-          </a:p>
-        </p:txBody>
-      </p:sp>
-      <p:sp>
-        <p:nvSpPr>
-          <p:cNvPr id="23" name="Terminator 22">
-            <a:extLst>
-              <a:ext uri="{FF2B5EF4-FFF2-40B4-BE49-F238E27FC236}">
-                <a16:creationId xmlns:a16="http://schemas.microsoft.com/office/drawing/2014/main" id="{4BEC1E42-5E54-D2CB-7992-E46DACA5142C}"/>
-              </a:ext>
-            </a:extLst>
-          </p:cNvPr>
-          <p:cNvSpPr/>
-          <p:nvPr/>
-        </p:nvSpPr>
-        <p:spPr>
-          <a:xfrm>
-            <a:off x="5389671" y="2039184"/>
-            <a:ext cx="1452880" cy="396240"/>
-          </a:xfrm>
-          <a:prstGeom prst="flowChartTerminator">
-            <a:avLst/>
-          </a:prstGeom>
-        </p:spPr>
-        <p:style>
-          <a:lnRef idx="2">
-            <a:schemeClr val="accent1">
-              <a:shade val="15000"/>
-            </a:schemeClr>
-          </a:lnRef>
-          <a:fillRef idx="1">
-            <a:schemeClr val="accent1"/>
-          </a:fillRef>
-          <a:effectRef idx="0">
-            <a:schemeClr val="accent1"/>
-          </a:effectRef>
-          <a:fontRef idx="minor">
-            <a:schemeClr val="lt1"/>
-          </a:fontRef>
-        </p:style>
-        <p:txBody>
-          <a:bodyPr rtlCol="0" anchor="ctr"/>
-          <a:lstStyle/>
-          <a:p>
-            <a:pPr algn="ctr"/>
-            <a:r>
-              <a:rPr lang="en-US" dirty="0"/>
-              <a:t>Commit 2</a:t>
-            </a:r>
-          </a:p>
-        </p:txBody>
-      </p:sp>
-      <p:sp>
-        <p:nvSpPr>
-          <p:cNvPr id="24" name="Terminator 23">
-            <a:extLst>
-              <a:ext uri="{FF2B5EF4-FFF2-40B4-BE49-F238E27FC236}">
-                <a16:creationId xmlns:a16="http://schemas.microsoft.com/office/drawing/2014/main" id="{7DFD0BCB-5A38-A65C-76FD-39E87B5A3F54}"/>
-              </a:ext>
-            </a:extLst>
-          </p:cNvPr>
-          <p:cNvSpPr/>
-          <p:nvPr/>
-        </p:nvSpPr>
-        <p:spPr>
-          <a:xfrm>
-            <a:off x="5389671" y="1500704"/>
-            <a:ext cx="1452880" cy="396240"/>
-          </a:xfrm>
-          <a:prstGeom prst="flowChartTerminator">
-            <a:avLst/>
-          </a:prstGeom>
-        </p:spPr>
-        <p:style>
-          <a:lnRef idx="2">
-            <a:schemeClr val="accent2">
-              <a:shade val="15000"/>
-            </a:schemeClr>
-          </a:lnRef>
-          <a:fillRef idx="1">
-            <a:schemeClr val="accent2"/>
-          </a:fillRef>
-          <a:effectRef idx="0">
-            <a:schemeClr val="accent2"/>
-          </a:effectRef>
-          <a:fontRef idx="minor">
-            <a:schemeClr val="lt1"/>
-          </a:fontRef>
-        </p:style>
-        <p:txBody>
-          <a:bodyPr rtlCol="0" anchor="ctr"/>
-          <a:lstStyle/>
-          <a:p>
-            <a:pPr algn="ctr"/>
-            <a:r>
-              <a:rPr lang="en-US" dirty="0"/>
-              <a:t>Commit 3</a:t>
-            </a:r>
-          </a:p>
-        </p:txBody>
-      </p:sp>
-      <p:cxnSp>
-        <p:nvCxnSpPr>
-          <p:cNvPr id="25" name="Straight Connector 24">
-            <a:extLst>
-              <a:ext uri="{FF2B5EF4-FFF2-40B4-BE49-F238E27FC236}">
-                <a16:creationId xmlns:a16="http://schemas.microsoft.com/office/drawing/2014/main" id="{CC1642D6-37EB-6BF4-7CFB-379404B835EF}"/>
-              </a:ext>
-            </a:extLst>
-          </p:cNvPr>
-          <p:cNvCxnSpPr>
-            <a:cxnSpLocks/>
-            <a:stCxn id="24" idx="2"/>
-            <a:endCxn id="23" idx="0"/>
-          </p:cNvCxnSpPr>
-          <p:nvPr/>
-        </p:nvCxnSpPr>
-        <p:spPr>
-          <a:xfrm>
-            <a:off x="6116111" y="1896944"/>
-            <a:ext cx="0" cy="146304"/>
-          </a:xfrm>
-          <a:prstGeom prst="line">
-            <a:avLst/>
-          </a:prstGeom>
-          <a:ln w="19050"/>
-        </p:spPr>
-        <p:style>
-          <a:lnRef idx="1">
-            <a:schemeClr val="accent1"/>
-          </a:lnRef>
-          <a:fillRef idx="0">
-            <a:schemeClr val="accent1"/>
-          </a:fillRef>
-          <a:effectRef idx="0">
-            <a:schemeClr val="accent1"/>
-          </a:effectRef>
-          <a:fontRef idx="minor">
-            <a:schemeClr val="tx1"/>
-          </a:fontRef>
-        </p:style>
-      </p:cxnSp>
-      <p:cxnSp>
-        <p:nvCxnSpPr>
-          <p:cNvPr id="26" name="Straight Connector 25">
-            <a:extLst>
-              <a:ext uri="{FF2B5EF4-FFF2-40B4-BE49-F238E27FC236}">
-                <a16:creationId xmlns:a16="http://schemas.microsoft.com/office/drawing/2014/main" id="{297C61E1-15CC-D9AE-EAFF-4CD3A6A9A8DF}"/>
-              </a:ext>
-            </a:extLst>
-          </p:cNvPr>
-          <p:cNvCxnSpPr>
-            <a:cxnSpLocks/>
-            <a:stCxn id="22" idx="0"/>
-            <a:endCxn id="23" idx="2"/>
-          </p:cNvCxnSpPr>
-          <p:nvPr/>
-        </p:nvCxnSpPr>
-        <p:spPr>
-          <a:xfrm flipV="1">
-            <a:off x="6116111" y="2435424"/>
-            <a:ext cx="0" cy="146304"/>
-          </a:xfrm>
-          <a:prstGeom prst="line">
-            <a:avLst/>
-          </a:prstGeom>
-          <a:ln w="19050"/>
-        </p:spPr>
-        <p:style>
-          <a:lnRef idx="1">
-            <a:schemeClr val="accent1"/>
-          </a:lnRef>
-          <a:fillRef idx="0">
-            <a:schemeClr val="accent1"/>
-          </a:fillRef>
-          <a:effectRef idx="0">
-            <a:schemeClr val="accent1"/>
-          </a:effectRef>
-          <a:fontRef idx="minor">
-            <a:schemeClr val="tx1"/>
-          </a:fontRef>
-        </p:style>
-      </p:cxnSp>
-      <p:sp>
-        <p:nvSpPr>
-          <p:cNvPr id="27" name="TextBox 26">
-            <a:extLst>
-              <a:ext uri="{FF2B5EF4-FFF2-40B4-BE49-F238E27FC236}">
-                <a16:creationId xmlns:a16="http://schemas.microsoft.com/office/drawing/2014/main" id="{7D320227-1867-7362-5404-8FB9B8B4C10D}"/>
-              </a:ext>
-            </a:extLst>
-          </p:cNvPr>
-          <p:cNvSpPr txBox="1"/>
-          <p:nvPr/>
-        </p:nvSpPr>
-        <p:spPr>
-          <a:xfrm>
-            <a:off x="5267960" y="539168"/>
-            <a:ext cx="1633652" cy="646331"/>
-          </a:xfrm>
-          <a:prstGeom prst="rect">
-            <a:avLst/>
-          </a:prstGeom>
-          <a:noFill/>
-        </p:spPr>
-        <p:txBody>
-          <a:bodyPr wrap="none" rtlCol="0">
-            <a:spAutoFit/>
-          </a:bodyPr>
-          <a:lstStyle/>
-          <a:p>
-            <a:pPr algn="ctr"/>
-            <a:r>
-              <a:rPr lang="en-US" dirty="0"/>
-              <a:t>GitHub Remote</a:t>
-            </a:r>
-          </a:p>
-          <a:p>
-            <a:pPr algn="ctr"/>
-            <a:r>
-              <a:rPr lang="en-US" dirty="0"/>
-              <a:t>(your fork)</a:t>
-            </a:r>
-          </a:p>
-        </p:txBody>
-      </p:sp>
-      <p:sp>
-        <p:nvSpPr>
-          <p:cNvPr id="28" name="Terminator 27">
-            <a:extLst>
-              <a:ext uri="{FF2B5EF4-FFF2-40B4-BE49-F238E27FC236}">
-                <a16:creationId xmlns:a16="http://schemas.microsoft.com/office/drawing/2014/main" id="{9C7D1E45-7032-AC99-2FDB-BDA7D4E04F28}"/>
-              </a:ext>
-            </a:extLst>
-          </p:cNvPr>
-          <p:cNvSpPr/>
-          <p:nvPr/>
-        </p:nvSpPr>
-        <p:spPr>
-          <a:xfrm>
-            <a:off x="2515451" y="2432907"/>
-            <a:ext cx="1452880" cy="396240"/>
-          </a:xfrm>
-          <a:prstGeom prst="flowChartTerminator">
-            <a:avLst/>
-          </a:prstGeom>
-        </p:spPr>
-        <p:style>
-          <a:lnRef idx="2">
-            <a:schemeClr val="accent1">
-              <a:shade val="15000"/>
-            </a:schemeClr>
-          </a:lnRef>
-          <a:fillRef idx="1">
-            <a:schemeClr val="accent1"/>
-          </a:fillRef>
-          <a:effectRef idx="0">
-            <a:schemeClr val="accent1"/>
-          </a:effectRef>
-          <a:fontRef idx="minor">
-            <a:schemeClr val="lt1"/>
-          </a:fontRef>
-        </p:style>
-        <p:txBody>
-          <a:bodyPr rtlCol="0" anchor="ctr"/>
-          <a:lstStyle/>
-          <a:p>
-            <a:pPr algn="ctr"/>
-            <a:r>
-              <a:rPr lang="en-US" dirty="0"/>
-              <a:t>Commit 1</a:t>
-            </a:r>
-          </a:p>
-        </p:txBody>
-      </p:sp>
-      <p:sp>
-        <p:nvSpPr>
-          <p:cNvPr id="29" name="Terminator 28">
-            <a:extLst>
-              <a:ext uri="{FF2B5EF4-FFF2-40B4-BE49-F238E27FC236}">
-                <a16:creationId xmlns:a16="http://schemas.microsoft.com/office/drawing/2014/main" id="{BB77BFDB-E2FE-449D-71D9-8993761D6F25}"/>
-              </a:ext>
-            </a:extLst>
-          </p:cNvPr>
-          <p:cNvSpPr/>
-          <p:nvPr/>
-        </p:nvSpPr>
-        <p:spPr>
-          <a:xfrm>
-            <a:off x="2515451" y="1894427"/>
-            <a:ext cx="1452880" cy="396240"/>
-          </a:xfrm>
-          <a:prstGeom prst="flowChartTerminator">
-            <a:avLst/>
-          </a:prstGeom>
-        </p:spPr>
-        <p:style>
-          <a:lnRef idx="2">
-            <a:schemeClr val="accent1">
-              <a:shade val="15000"/>
-            </a:schemeClr>
-          </a:lnRef>
-          <a:fillRef idx="1">
-            <a:schemeClr val="accent1"/>
-          </a:fillRef>
-          <a:effectRef idx="0">
-            <a:schemeClr val="accent1"/>
-          </a:effectRef>
-          <a:fontRef idx="minor">
-            <a:schemeClr val="lt1"/>
-          </a:fontRef>
-        </p:style>
-        <p:txBody>
-          <a:bodyPr rtlCol="0" anchor="ctr"/>
-          <a:lstStyle/>
-          <a:p>
-            <a:pPr algn="ctr"/>
-            <a:r>
-              <a:rPr lang="en-US" dirty="0"/>
-              <a:t>Commit 2</a:t>
-            </a:r>
-          </a:p>
-        </p:txBody>
-      </p:sp>
-      <p:cxnSp>
-        <p:nvCxnSpPr>
-          <p:cNvPr id="30" name="Straight Connector 29">
-            <a:extLst>
-              <a:ext uri="{FF2B5EF4-FFF2-40B4-BE49-F238E27FC236}">
-                <a16:creationId xmlns:a16="http://schemas.microsoft.com/office/drawing/2014/main" id="{D3CDA352-BDEA-A240-DDA7-57255B8C76D8}"/>
-              </a:ext>
-            </a:extLst>
-          </p:cNvPr>
-          <p:cNvCxnSpPr>
-            <a:cxnSpLocks/>
-            <a:stCxn id="28" idx="0"/>
-            <a:endCxn id="29" idx="2"/>
-          </p:cNvCxnSpPr>
-          <p:nvPr/>
-        </p:nvCxnSpPr>
-        <p:spPr>
-          <a:xfrm flipV="1">
-            <a:off x="3241891" y="2290667"/>
-            <a:ext cx="0" cy="146304"/>
-          </a:xfrm>
-          <a:prstGeom prst="line">
-            <a:avLst/>
-          </a:prstGeom>
-          <a:ln w="19050"/>
-        </p:spPr>
-        <p:style>
-          <a:lnRef idx="1">
-            <a:schemeClr val="accent1"/>
-          </a:lnRef>
-          <a:fillRef idx="0">
-            <a:schemeClr val="accent1"/>
-          </a:fillRef>
-          <a:effectRef idx="0">
-            <a:schemeClr val="accent1"/>
-          </a:effectRef>
-          <a:fontRef idx="minor">
-            <a:schemeClr val="tx1"/>
-          </a:fontRef>
-        </p:style>
-      </p:cxnSp>
-      <p:sp>
-        <p:nvSpPr>
-          <p:cNvPr id="31" name="TextBox 30">
-            <a:extLst>
-              <a:ext uri="{FF2B5EF4-FFF2-40B4-BE49-F238E27FC236}">
-                <a16:creationId xmlns:a16="http://schemas.microsoft.com/office/drawing/2014/main" id="{87F2AE8A-CC1B-26FE-C17F-A0AFB22E301E}"/>
-              </a:ext>
-            </a:extLst>
-          </p:cNvPr>
-          <p:cNvSpPr txBox="1"/>
-          <p:nvPr/>
-        </p:nvSpPr>
-        <p:spPr>
-          <a:xfrm>
-            <a:off x="2456266" y="569162"/>
-            <a:ext cx="1571264" cy="646331"/>
-          </a:xfrm>
-          <a:prstGeom prst="rect">
-            <a:avLst/>
-          </a:prstGeom>
-          <a:noFill/>
-        </p:spPr>
-        <p:txBody>
-          <a:bodyPr wrap="none" rtlCol="0">
-            <a:spAutoFit/>
-          </a:bodyPr>
-          <a:lstStyle/>
-          <a:p>
-            <a:pPr algn="ctr"/>
-            <a:r>
-              <a:rPr lang="en-US" dirty="0"/>
-              <a:t>Original Repo </a:t>
-            </a:r>
-          </a:p>
-          <a:p>
-            <a:pPr algn="ctr"/>
-            <a:r>
-              <a:rPr lang="en-US" dirty="0"/>
-              <a:t>(lab repo)</a:t>
-            </a:r>
-          </a:p>
-        </p:txBody>
-      </p:sp>
-      <p:cxnSp>
-        <p:nvCxnSpPr>
-          <p:cNvPr id="33" name="Straight Arrow Connector 32">
-            <a:extLst>
-              <a:ext uri="{FF2B5EF4-FFF2-40B4-BE49-F238E27FC236}">
-                <a16:creationId xmlns:a16="http://schemas.microsoft.com/office/drawing/2014/main" id="{C388079E-8CC9-7DDB-5F8B-443514A3595E}"/>
-              </a:ext>
-            </a:extLst>
-          </p:cNvPr>
-          <p:cNvCxnSpPr>
-            <a:cxnSpLocks/>
-            <a:stCxn id="21" idx="0"/>
-            <a:endCxn id="5" idx="2"/>
-          </p:cNvCxnSpPr>
-          <p:nvPr/>
-        </p:nvCxnSpPr>
-        <p:spPr>
-          <a:xfrm flipH="1" flipV="1">
-            <a:off x="6096000" y="3079708"/>
-            <a:ext cx="2093805" cy="494268"/>
-          </a:xfrm>
-          <a:prstGeom prst="straightConnector1">
-            <a:avLst/>
-          </a:prstGeom>
-          <a:ln w="38100">
-            <a:solidFill>
-              <a:schemeClr val="accent1"/>
-            </a:solidFill>
-            <a:headEnd type="triangle"/>
-            <a:tailEnd type="none"/>
-          </a:ln>
-        </p:spPr>
-        <p:style>
-          <a:lnRef idx="1">
-            <a:schemeClr val="accent1"/>
-          </a:lnRef>
-          <a:fillRef idx="0">
-            <a:schemeClr val="accent1"/>
-          </a:fillRef>
-          <a:effectRef idx="0">
-            <a:schemeClr val="accent1"/>
-          </a:effectRef>
-          <a:fontRef idx="minor">
-            <a:schemeClr val="tx1"/>
-          </a:fontRef>
-        </p:style>
-      </p:cxnSp>
-      <p:sp>
-        <p:nvSpPr>
-          <p:cNvPr id="35" name="Terminator 34">
-            <a:extLst>
-              <a:ext uri="{FF2B5EF4-FFF2-40B4-BE49-F238E27FC236}">
-                <a16:creationId xmlns:a16="http://schemas.microsoft.com/office/drawing/2014/main" id="{B47BBD02-E63C-4673-F3AD-BA6BAAA37936}"/>
-              </a:ext>
-            </a:extLst>
-          </p:cNvPr>
-          <p:cNvSpPr/>
-          <p:nvPr/>
-        </p:nvSpPr>
-        <p:spPr>
-          <a:xfrm>
-            <a:off x="3420530" y="4121388"/>
-            <a:ext cx="1452880" cy="396240"/>
-          </a:xfrm>
-          <a:prstGeom prst="flowChartTerminator">
-            <a:avLst/>
-          </a:prstGeom>
-        </p:spPr>
-        <p:style>
-          <a:lnRef idx="2">
-            <a:schemeClr val="accent2">
-              <a:shade val="15000"/>
-            </a:schemeClr>
-          </a:lnRef>
-          <a:fillRef idx="1">
-            <a:schemeClr val="accent2"/>
-          </a:fillRef>
-          <a:effectRef idx="0">
-            <a:schemeClr val="accent2"/>
-          </a:effectRef>
-          <a:fontRef idx="minor">
-            <a:schemeClr val="lt1"/>
-          </a:fontRef>
-        </p:style>
-        <p:txBody>
-          <a:bodyPr rtlCol="0" anchor="ctr"/>
-          <a:lstStyle/>
-          <a:p>
-            <a:pPr algn="ctr"/>
-            <a:r>
-              <a:rPr lang="en-US" dirty="0"/>
-              <a:t>File(s)</a:t>
-            </a:r>
-          </a:p>
-        </p:txBody>
-      </p:sp>
-      <p:sp>
-        <p:nvSpPr>
-          <p:cNvPr id="36" name="Terminator 35">
-            <a:extLst>
-              <a:ext uri="{FF2B5EF4-FFF2-40B4-BE49-F238E27FC236}">
-                <a16:creationId xmlns:a16="http://schemas.microsoft.com/office/drawing/2014/main" id="{92DE398E-7658-5B34-26D8-469681337140}"/>
-              </a:ext>
-            </a:extLst>
-          </p:cNvPr>
-          <p:cNvSpPr/>
-          <p:nvPr/>
-        </p:nvSpPr>
-        <p:spPr>
-          <a:xfrm>
-            <a:off x="7465905" y="4121388"/>
-            <a:ext cx="1452880" cy="396240"/>
-          </a:xfrm>
-          <a:prstGeom prst="flowChartTerminator">
-            <a:avLst/>
-          </a:prstGeom>
-        </p:spPr>
-        <p:style>
-          <a:lnRef idx="2">
-            <a:schemeClr val="accent2">
-              <a:shade val="15000"/>
-            </a:schemeClr>
-          </a:lnRef>
-          <a:fillRef idx="1">
-            <a:schemeClr val="accent2"/>
-          </a:fillRef>
-          <a:effectRef idx="0">
-            <a:schemeClr val="accent2"/>
-          </a:effectRef>
-          <a:fontRef idx="minor">
-            <a:schemeClr val="lt1"/>
-          </a:fontRef>
-        </p:style>
-        <p:txBody>
-          <a:bodyPr rtlCol="0" anchor="ctr"/>
-          <a:lstStyle/>
-          <a:p>
-            <a:pPr algn="ctr"/>
-            <a:r>
-              <a:rPr lang="en-US" dirty="0"/>
-              <a:t>File(s)</a:t>
-            </a:r>
-          </a:p>
-        </p:txBody>
-      </p:sp>
-      <p:pic>
-        <p:nvPicPr>
-          <p:cNvPr id="37" name="Picture 36" descr="A black cat with a white circle in the background&#10;&#10;Description automatically generated">
-            <a:extLst>
-              <a:ext uri="{FF2B5EF4-FFF2-40B4-BE49-F238E27FC236}">
-                <a16:creationId xmlns:a16="http://schemas.microsoft.com/office/drawing/2014/main" id="{F33F32D5-E9E0-C1B0-7224-0A0ECE395C44}"/>
-              </a:ext>
-            </a:extLst>
-          </p:cNvPr>
-          <p:cNvPicPr>
-            <a:picLocks noChangeAspect="1"/>
-          </p:cNvPicPr>
-          <p:nvPr/>
-        </p:nvPicPr>
-        <p:blipFill>
-          <a:blip r:embed="rId3">
-            <a:alphaModFix/>
-          </a:blip>
-          <a:stretch>
-            <a:fillRect/>
-          </a:stretch>
-        </p:blipFill>
-        <p:spPr>
-          <a:xfrm>
-            <a:off x="298453" y="520649"/>
-            <a:ext cx="1332653" cy="1303682"/>
-          </a:xfrm>
-          <a:prstGeom prst="rect">
-            <a:avLst/>
-          </a:prstGeom>
-          <a:solidFill>
-            <a:schemeClr val="accent1"/>
-          </a:solidFill>
-        </p:spPr>
-      </p:pic>
-      <p:pic>
-        <p:nvPicPr>
-          <p:cNvPr id="38" name="Graphic 37" descr="Laptop with solid fill">
-            <a:extLst>
-              <a:ext uri="{FF2B5EF4-FFF2-40B4-BE49-F238E27FC236}">
-                <a16:creationId xmlns:a16="http://schemas.microsoft.com/office/drawing/2014/main" id="{6D49662D-6C04-3073-C51B-FB57A07EDE0A}"/>
-              </a:ext>
-            </a:extLst>
-          </p:cNvPr>
-          <p:cNvPicPr>
-            <a:picLocks noChangeAspect="1"/>
-          </p:cNvPicPr>
-          <p:nvPr/>
-        </p:nvPicPr>
-        <p:blipFill>
-          <a:blip r:embed="rId4">
-            <a:extLst>
-              <a:ext uri="{96DAC541-7B7A-43D3-8B79-37D633B846F1}">
-                <asvg:svgBlip xmlns:asvg="http://schemas.microsoft.com/office/drawing/2016/SVG/main" r:embed="rId5"/>
-              </a:ext>
-            </a:extLst>
-          </a:blip>
-          <a:stretch>
-            <a:fillRect/>
-          </a:stretch>
-        </p:blipFill>
-        <p:spPr>
-          <a:xfrm>
-            <a:off x="9278" y="4628044"/>
-            <a:ext cx="2133917" cy="2133917"/>
-          </a:xfrm>
-          <a:prstGeom prst="rect">
-            <a:avLst/>
-          </a:prstGeom>
-        </p:spPr>
-      </p:pic>
-      <p:sp>
-        <p:nvSpPr>
-          <p:cNvPr id="39" name="TextBox 38">
-            <a:extLst>
-              <a:ext uri="{FF2B5EF4-FFF2-40B4-BE49-F238E27FC236}">
-                <a16:creationId xmlns:a16="http://schemas.microsoft.com/office/drawing/2014/main" id="{0F46598B-AED5-15D6-243E-ABB3481AC5C0}"/>
-              </a:ext>
-            </a:extLst>
-          </p:cNvPr>
-          <p:cNvSpPr txBox="1"/>
-          <p:nvPr/>
-        </p:nvSpPr>
-        <p:spPr>
-          <a:xfrm rot="933119">
-            <a:off x="7297253" y="3069037"/>
-            <a:ext cx="691215" cy="369332"/>
-          </a:xfrm>
-          <a:prstGeom prst="rect">
-            <a:avLst/>
-          </a:prstGeom>
-          <a:noFill/>
-        </p:spPr>
-        <p:txBody>
-          <a:bodyPr wrap="none" rtlCol="0">
-            <a:spAutoFit/>
-          </a:bodyPr>
-          <a:lstStyle/>
-          <a:p>
-            <a:r>
-              <a:rPr lang="en-US">
-                <a:highlight>
-                  <a:srgbClr val="FFFF00"/>
-                </a:highlight>
-                <a:latin typeface="Consolas" panose="020B0609020204030204" pitchFamily="49" charset="0"/>
-                <a:cs typeface="Consolas" panose="020B0609020204030204" pitchFamily="49" charset="0"/>
-              </a:rPr>
-              <a:t>pull</a:t>
-            </a:r>
-          </a:p>
-        </p:txBody>
-      </p:sp>
-    </p:spTree>
-    <p:extLst>
-      <p:ext uri="{BB962C8B-B14F-4D97-AF65-F5344CB8AC3E}">
-        <p14:creationId xmlns:p14="http://schemas.microsoft.com/office/powerpoint/2010/main" val="1377941306"/>
       </p:ext>
     </p:extLst>
   </p:cSld>
@@ -27390,6 +25971,1709 @@
         <p:cNvPr id="1" name="">
           <a:extLst>
             <a:ext uri="{FF2B5EF4-FFF2-40B4-BE49-F238E27FC236}">
+              <a16:creationId xmlns:a16="http://schemas.microsoft.com/office/drawing/2014/main" id="{A53094D5-CBCD-8CC5-BCA4-B22C7E0FE60D}"/>
+            </a:ext>
+          </a:extLst>
+        </p:cNvPr>
+        <p:cNvGrpSpPr/>
+        <p:nvPr/>
+      </p:nvGrpSpPr>
+      <p:grpSpPr>
+        <a:xfrm>
+          <a:off x="0" y="0"/>
+          <a:ext cx="0" cy="0"/>
+          <a:chOff x="0" y="0"/>
+          <a:chExt cx="0" cy="0"/>
+        </a:xfrm>
+      </p:grpSpPr>
+      <p:sp>
+        <p:nvSpPr>
+          <p:cNvPr id="2" name="Rectangle 1">
+            <a:extLst>
+              <a:ext uri="{FF2B5EF4-FFF2-40B4-BE49-F238E27FC236}">
+                <a16:creationId xmlns:a16="http://schemas.microsoft.com/office/drawing/2014/main" id="{981430D3-F244-3F17-C558-EF9D83C7EE10}"/>
+              </a:ext>
+            </a:extLst>
+          </p:cNvPr>
+          <p:cNvSpPr/>
+          <p:nvPr/>
+        </p:nvSpPr>
+        <p:spPr>
+          <a:xfrm>
+            <a:off x="7158565" y="3573976"/>
+            <a:ext cx="2062480" cy="3037840"/>
+          </a:xfrm>
+          <a:prstGeom prst="rect">
+            <a:avLst/>
+          </a:prstGeom>
+          <a:solidFill>
+            <a:schemeClr val="bg1"/>
+          </a:solidFill>
+        </p:spPr>
+        <p:style>
+          <a:lnRef idx="2">
+            <a:schemeClr val="accent1">
+              <a:shade val="15000"/>
+            </a:schemeClr>
+          </a:lnRef>
+          <a:fillRef idx="1">
+            <a:schemeClr val="accent1"/>
+          </a:fillRef>
+          <a:effectRef idx="0">
+            <a:schemeClr val="accent1"/>
+          </a:effectRef>
+          <a:fontRef idx="minor">
+            <a:schemeClr val="lt1"/>
+          </a:fontRef>
+        </p:style>
+        <p:txBody>
+          <a:bodyPr rtlCol="0" anchor="ctr"/>
+          <a:lstStyle/>
+          <a:p>
+            <a:pPr algn="ctr"/>
+            <a:endParaRPr lang="en-US"/>
+          </a:p>
+        </p:txBody>
+      </p:sp>
+      <p:sp>
+        <p:nvSpPr>
+          <p:cNvPr id="3" name="Rectangle 2">
+            <a:extLst>
+              <a:ext uri="{FF2B5EF4-FFF2-40B4-BE49-F238E27FC236}">
+                <a16:creationId xmlns:a16="http://schemas.microsoft.com/office/drawing/2014/main" id="{450F0567-832B-74BF-D040-36AF65A9129F}"/>
+              </a:ext>
+            </a:extLst>
+          </p:cNvPr>
+          <p:cNvSpPr/>
+          <p:nvPr/>
+        </p:nvSpPr>
+        <p:spPr>
+          <a:xfrm>
+            <a:off x="3095619" y="3600548"/>
+            <a:ext cx="2062480" cy="3037840"/>
+          </a:xfrm>
+          <a:prstGeom prst="rect">
+            <a:avLst/>
+          </a:prstGeom>
+          <a:solidFill>
+            <a:schemeClr val="bg1"/>
+          </a:solidFill>
+        </p:spPr>
+        <p:style>
+          <a:lnRef idx="2">
+            <a:schemeClr val="accent1">
+              <a:shade val="15000"/>
+            </a:schemeClr>
+          </a:lnRef>
+          <a:fillRef idx="1">
+            <a:schemeClr val="accent1"/>
+          </a:fillRef>
+          <a:effectRef idx="0">
+            <a:schemeClr val="accent1"/>
+          </a:effectRef>
+          <a:fontRef idx="minor">
+            <a:schemeClr val="lt1"/>
+          </a:fontRef>
+        </p:style>
+        <p:txBody>
+          <a:bodyPr rtlCol="0" anchor="ctr"/>
+          <a:lstStyle/>
+          <a:p>
+            <a:pPr algn="ctr"/>
+            <a:endParaRPr lang="en-US"/>
+          </a:p>
+        </p:txBody>
+      </p:sp>
+      <p:sp>
+        <p:nvSpPr>
+          <p:cNvPr id="4" name="Rectangle 3">
+            <a:extLst>
+              <a:ext uri="{FF2B5EF4-FFF2-40B4-BE49-F238E27FC236}">
+                <a16:creationId xmlns:a16="http://schemas.microsoft.com/office/drawing/2014/main" id="{72E2869F-DAA8-42DC-4DB3-60EC3AC84EDF}"/>
+              </a:ext>
+            </a:extLst>
+          </p:cNvPr>
+          <p:cNvSpPr/>
+          <p:nvPr/>
+        </p:nvSpPr>
+        <p:spPr>
+          <a:xfrm>
+            <a:off x="2210651" y="468118"/>
+            <a:ext cx="2062480" cy="2482948"/>
+          </a:xfrm>
+          <a:prstGeom prst="rect">
+            <a:avLst/>
+          </a:prstGeom>
+          <a:solidFill>
+            <a:schemeClr val="bg1"/>
+          </a:solidFill>
+        </p:spPr>
+        <p:style>
+          <a:lnRef idx="2">
+            <a:schemeClr val="accent1">
+              <a:shade val="15000"/>
+            </a:schemeClr>
+          </a:lnRef>
+          <a:fillRef idx="1">
+            <a:schemeClr val="accent1"/>
+          </a:fillRef>
+          <a:effectRef idx="0">
+            <a:schemeClr val="accent1"/>
+          </a:effectRef>
+          <a:fontRef idx="minor">
+            <a:schemeClr val="lt1"/>
+          </a:fontRef>
+        </p:style>
+        <p:txBody>
+          <a:bodyPr rtlCol="0" anchor="ctr"/>
+          <a:lstStyle/>
+          <a:p>
+            <a:pPr algn="ctr"/>
+            <a:endParaRPr lang="en-US"/>
+          </a:p>
+        </p:txBody>
+      </p:sp>
+      <p:sp>
+        <p:nvSpPr>
+          <p:cNvPr id="5" name="Rectangle 4">
+            <a:extLst>
+              <a:ext uri="{FF2B5EF4-FFF2-40B4-BE49-F238E27FC236}">
+                <a16:creationId xmlns:a16="http://schemas.microsoft.com/office/drawing/2014/main" id="{E0996AE5-9C92-DBD3-95D2-4E5F307EB719}"/>
+              </a:ext>
+            </a:extLst>
+          </p:cNvPr>
+          <p:cNvSpPr/>
+          <p:nvPr/>
+        </p:nvSpPr>
+        <p:spPr>
+          <a:xfrm>
+            <a:off x="5064760" y="467360"/>
+            <a:ext cx="2062480" cy="2612348"/>
+          </a:xfrm>
+          <a:prstGeom prst="rect">
+            <a:avLst/>
+          </a:prstGeom>
+          <a:solidFill>
+            <a:schemeClr val="bg1"/>
+          </a:solidFill>
+        </p:spPr>
+        <p:style>
+          <a:lnRef idx="2">
+            <a:schemeClr val="accent1">
+              <a:shade val="15000"/>
+            </a:schemeClr>
+          </a:lnRef>
+          <a:fillRef idx="1">
+            <a:schemeClr val="accent1"/>
+          </a:fillRef>
+          <a:effectRef idx="0">
+            <a:schemeClr val="accent1"/>
+          </a:effectRef>
+          <a:fontRef idx="minor">
+            <a:schemeClr val="lt1"/>
+          </a:fontRef>
+        </p:style>
+        <p:txBody>
+          <a:bodyPr rtlCol="0" anchor="ctr"/>
+          <a:lstStyle/>
+          <a:p>
+            <a:pPr algn="ctr"/>
+            <a:endParaRPr lang="en-US"/>
+          </a:p>
+        </p:txBody>
+      </p:sp>
+      <p:sp>
+        <p:nvSpPr>
+          <p:cNvPr id="6" name="Rectangle 5">
+            <a:extLst>
+              <a:ext uri="{FF2B5EF4-FFF2-40B4-BE49-F238E27FC236}">
+                <a16:creationId xmlns:a16="http://schemas.microsoft.com/office/drawing/2014/main" id="{BF4066DC-A892-6F9F-AE9D-D28AD3DF4DF0}"/>
+              </a:ext>
+            </a:extLst>
+          </p:cNvPr>
+          <p:cNvSpPr/>
+          <p:nvPr/>
+        </p:nvSpPr>
+        <p:spPr>
+          <a:xfrm>
+            <a:off x="7361765" y="4620624"/>
+            <a:ext cx="1656080" cy="2005818"/>
+          </a:xfrm>
+          <a:prstGeom prst="rect">
+            <a:avLst/>
+          </a:prstGeom>
+          <a:solidFill>
+            <a:schemeClr val="accent3">
+              <a:lumMod val="40000"/>
+              <a:lumOff val="60000"/>
+            </a:schemeClr>
+          </a:solidFill>
+          <a:ln>
+            <a:solidFill>
+              <a:schemeClr val="tx1"/>
+            </a:solidFill>
+          </a:ln>
+        </p:spPr>
+        <p:style>
+          <a:lnRef idx="2">
+            <a:schemeClr val="accent1"/>
+          </a:lnRef>
+          <a:fillRef idx="1">
+            <a:schemeClr val="lt1"/>
+          </a:fillRef>
+          <a:effectRef idx="0">
+            <a:schemeClr val="accent1"/>
+          </a:effectRef>
+          <a:fontRef idx="minor">
+            <a:schemeClr val="dk1"/>
+          </a:fontRef>
+        </p:style>
+        <p:txBody>
+          <a:bodyPr rtlCol="0" anchor="t"/>
+          <a:lstStyle/>
+          <a:p>
+            <a:pPr algn="ctr"/>
+            <a:r>
+              <a:rPr lang="en-US" sz="1600" dirty="0"/>
+              <a:t>Version DB</a:t>
+            </a:r>
+          </a:p>
+        </p:txBody>
+      </p:sp>
+      <p:sp>
+        <p:nvSpPr>
+          <p:cNvPr id="7" name="Rectangle 6">
+            <a:extLst>
+              <a:ext uri="{FF2B5EF4-FFF2-40B4-BE49-F238E27FC236}">
+                <a16:creationId xmlns:a16="http://schemas.microsoft.com/office/drawing/2014/main" id="{66FBF893-A7D2-8F47-096F-F72CBD9A54EC}"/>
+              </a:ext>
+            </a:extLst>
+          </p:cNvPr>
+          <p:cNvSpPr/>
+          <p:nvPr/>
+        </p:nvSpPr>
+        <p:spPr>
+          <a:xfrm>
+            <a:off x="2418931" y="1185499"/>
+            <a:ext cx="1656080" cy="1724499"/>
+          </a:xfrm>
+          <a:prstGeom prst="rect">
+            <a:avLst/>
+          </a:prstGeom>
+          <a:solidFill>
+            <a:schemeClr val="accent3">
+              <a:lumMod val="40000"/>
+              <a:lumOff val="60000"/>
+            </a:schemeClr>
+          </a:solidFill>
+          <a:ln>
+            <a:solidFill>
+              <a:schemeClr val="tx1"/>
+            </a:solidFill>
+          </a:ln>
+        </p:spPr>
+        <p:style>
+          <a:lnRef idx="2">
+            <a:schemeClr val="accent1"/>
+          </a:lnRef>
+          <a:fillRef idx="1">
+            <a:schemeClr val="lt1"/>
+          </a:fillRef>
+          <a:effectRef idx="0">
+            <a:schemeClr val="accent1"/>
+          </a:effectRef>
+          <a:fontRef idx="minor">
+            <a:schemeClr val="dk1"/>
+          </a:fontRef>
+        </p:style>
+        <p:txBody>
+          <a:bodyPr rtlCol="0" anchor="t"/>
+          <a:lstStyle/>
+          <a:p>
+            <a:pPr algn="ctr"/>
+            <a:r>
+              <a:rPr lang="en-US" sz="1600" dirty="0"/>
+              <a:t>Version DB</a:t>
+            </a:r>
+          </a:p>
+        </p:txBody>
+      </p:sp>
+      <p:sp>
+        <p:nvSpPr>
+          <p:cNvPr id="8" name="Rectangle 7">
+            <a:extLst>
+              <a:ext uri="{FF2B5EF4-FFF2-40B4-BE49-F238E27FC236}">
+                <a16:creationId xmlns:a16="http://schemas.microsoft.com/office/drawing/2014/main" id="{E980AAA2-5F10-F979-3229-DD5D70651A37}"/>
+              </a:ext>
+            </a:extLst>
+          </p:cNvPr>
+          <p:cNvSpPr/>
+          <p:nvPr/>
+        </p:nvSpPr>
+        <p:spPr>
+          <a:xfrm>
+            <a:off x="3318930" y="4620624"/>
+            <a:ext cx="1656080" cy="1991191"/>
+          </a:xfrm>
+          <a:prstGeom prst="rect">
+            <a:avLst/>
+          </a:prstGeom>
+          <a:solidFill>
+            <a:schemeClr val="accent3">
+              <a:lumMod val="40000"/>
+              <a:lumOff val="60000"/>
+            </a:schemeClr>
+          </a:solidFill>
+          <a:ln>
+            <a:solidFill>
+              <a:schemeClr val="tx1"/>
+            </a:solidFill>
+          </a:ln>
+        </p:spPr>
+        <p:style>
+          <a:lnRef idx="2">
+            <a:schemeClr val="accent1"/>
+          </a:lnRef>
+          <a:fillRef idx="1">
+            <a:schemeClr val="lt1"/>
+          </a:fillRef>
+          <a:effectRef idx="0">
+            <a:schemeClr val="accent1"/>
+          </a:effectRef>
+          <a:fontRef idx="minor">
+            <a:schemeClr val="dk1"/>
+          </a:fontRef>
+        </p:style>
+        <p:txBody>
+          <a:bodyPr rtlCol="0" anchor="t"/>
+          <a:lstStyle/>
+          <a:p>
+            <a:pPr algn="ctr"/>
+            <a:r>
+              <a:rPr lang="en-US" sz="1600" dirty="0"/>
+              <a:t>Version DB</a:t>
+            </a:r>
+          </a:p>
+        </p:txBody>
+      </p:sp>
+      <p:sp>
+        <p:nvSpPr>
+          <p:cNvPr id="9" name="Rectangle 8">
+            <a:extLst>
+              <a:ext uri="{FF2B5EF4-FFF2-40B4-BE49-F238E27FC236}">
+                <a16:creationId xmlns:a16="http://schemas.microsoft.com/office/drawing/2014/main" id="{5067553A-E849-805A-4121-ABA23483A39C}"/>
+              </a:ext>
+            </a:extLst>
+          </p:cNvPr>
+          <p:cNvSpPr/>
+          <p:nvPr/>
+        </p:nvSpPr>
+        <p:spPr>
+          <a:xfrm>
+            <a:off x="5267960" y="1176944"/>
+            <a:ext cx="1656080" cy="1853700"/>
+          </a:xfrm>
+          <a:prstGeom prst="rect">
+            <a:avLst/>
+          </a:prstGeom>
+          <a:solidFill>
+            <a:schemeClr val="accent3">
+              <a:lumMod val="40000"/>
+              <a:lumOff val="60000"/>
+            </a:schemeClr>
+          </a:solidFill>
+          <a:ln>
+            <a:solidFill>
+              <a:schemeClr val="tx1"/>
+            </a:solidFill>
+          </a:ln>
+        </p:spPr>
+        <p:style>
+          <a:lnRef idx="2">
+            <a:schemeClr val="accent1"/>
+          </a:lnRef>
+          <a:fillRef idx="1">
+            <a:schemeClr val="lt1"/>
+          </a:fillRef>
+          <a:effectRef idx="0">
+            <a:schemeClr val="accent1"/>
+          </a:effectRef>
+          <a:fontRef idx="minor">
+            <a:schemeClr val="dk1"/>
+          </a:fontRef>
+        </p:style>
+        <p:txBody>
+          <a:bodyPr rtlCol="0" anchor="t"/>
+          <a:lstStyle/>
+          <a:p>
+            <a:pPr algn="ctr"/>
+            <a:r>
+              <a:rPr lang="en-US" sz="1600" dirty="0"/>
+              <a:t>Version DB</a:t>
+            </a:r>
+          </a:p>
+        </p:txBody>
+      </p:sp>
+      <p:sp>
+        <p:nvSpPr>
+          <p:cNvPr id="10" name="Terminator 9">
+            <a:extLst>
+              <a:ext uri="{FF2B5EF4-FFF2-40B4-BE49-F238E27FC236}">
+                <a16:creationId xmlns:a16="http://schemas.microsoft.com/office/drawing/2014/main" id="{1FC938A9-8A73-1FB9-2D98-C421DD9ABF27}"/>
+              </a:ext>
+            </a:extLst>
+          </p:cNvPr>
+          <p:cNvSpPr/>
+          <p:nvPr/>
+        </p:nvSpPr>
+        <p:spPr>
+          <a:xfrm>
+            <a:off x="3400419" y="6120228"/>
+            <a:ext cx="1452880" cy="396240"/>
+          </a:xfrm>
+          <a:prstGeom prst="flowChartTerminator">
+            <a:avLst/>
+          </a:prstGeom>
+        </p:spPr>
+        <p:style>
+          <a:lnRef idx="2">
+            <a:schemeClr val="accent1">
+              <a:shade val="15000"/>
+            </a:schemeClr>
+          </a:lnRef>
+          <a:fillRef idx="1">
+            <a:schemeClr val="accent1"/>
+          </a:fillRef>
+          <a:effectRef idx="0">
+            <a:schemeClr val="accent1"/>
+          </a:effectRef>
+          <a:fontRef idx="minor">
+            <a:schemeClr val="lt1"/>
+          </a:fontRef>
+        </p:style>
+        <p:txBody>
+          <a:bodyPr rtlCol="0" anchor="ctr"/>
+          <a:lstStyle/>
+          <a:p>
+            <a:pPr algn="ctr"/>
+            <a:r>
+              <a:rPr lang="en-US" dirty="0"/>
+              <a:t>Commit 1</a:t>
+            </a:r>
+          </a:p>
+        </p:txBody>
+      </p:sp>
+      <p:sp>
+        <p:nvSpPr>
+          <p:cNvPr id="11" name="Terminator 10">
+            <a:extLst>
+              <a:ext uri="{FF2B5EF4-FFF2-40B4-BE49-F238E27FC236}">
+                <a16:creationId xmlns:a16="http://schemas.microsoft.com/office/drawing/2014/main" id="{3A34AF48-7B63-ED55-4D85-62FC9F3DFD97}"/>
+              </a:ext>
+            </a:extLst>
+          </p:cNvPr>
+          <p:cNvSpPr/>
+          <p:nvPr/>
+        </p:nvSpPr>
+        <p:spPr>
+          <a:xfrm>
+            <a:off x="3400419" y="5581748"/>
+            <a:ext cx="1452880" cy="396240"/>
+          </a:xfrm>
+          <a:prstGeom prst="flowChartTerminator">
+            <a:avLst/>
+          </a:prstGeom>
+        </p:spPr>
+        <p:style>
+          <a:lnRef idx="2">
+            <a:schemeClr val="accent1">
+              <a:shade val="15000"/>
+            </a:schemeClr>
+          </a:lnRef>
+          <a:fillRef idx="1">
+            <a:schemeClr val="accent1"/>
+          </a:fillRef>
+          <a:effectRef idx="0">
+            <a:schemeClr val="accent1"/>
+          </a:effectRef>
+          <a:fontRef idx="minor">
+            <a:schemeClr val="lt1"/>
+          </a:fontRef>
+        </p:style>
+        <p:txBody>
+          <a:bodyPr rtlCol="0" anchor="ctr"/>
+          <a:lstStyle/>
+          <a:p>
+            <a:pPr algn="ctr"/>
+            <a:r>
+              <a:rPr lang="en-US" dirty="0"/>
+              <a:t>Commit 2</a:t>
+            </a:r>
+          </a:p>
+        </p:txBody>
+      </p:sp>
+      <p:sp>
+        <p:nvSpPr>
+          <p:cNvPr id="12" name="Terminator 11">
+            <a:extLst>
+              <a:ext uri="{FF2B5EF4-FFF2-40B4-BE49-F238E27FC236}">
+                <a16:creationId xmlns:a16="http://schemas.microsoft.com/office/drawing/2014/main" id="{9A66AF4C-7C8B-37B9-9841-170A6342BE0A}"/>
+              </a:ext>
+            </a:extLst>
+          </p:cNvPr>
+          <p:cNvSpPr/>
+          <p:nvPr/>
+        </p:nvSpPr>
+        <p:spPr>
+          <a:xfrm>
+            <a:off x="3400419" y="5043268"/>
+            <a:ext cx="1452880" cy="396240"/>
+          </a:xfrm>
+          <a:prstGeom prst="flowChartTerminator">
+            <a:avLst/>
+          </a:prstGeom>
+        </p:spPr>
+        <p:style>
+          <a:lnRef idx="2">
+            <a:schemeClr val="accent2">
+              <a:shade val="15000"/>
+            </a:schemeClr>
+          </a:lnRef>
+          <a:fillRef idx="1">
+            <a:schemeClr val="accent2"/>
+          </a:fillRef>
+          <a:effectRef idx="0">
+            <a:schemeClr val="accent2"/>
+          </a:effectRef>
+          <a:fontRef idx="minor">
+            <a:schemeClr val="lt1"/>
+          </a:fontRef>
+        </p:style>
+        <p:txBody>
+          <a:bodyPr rtlCol="0" anchor="ctr"/>
+          <a:lstStyle/>
+          <a:p>
+            <a:pPr algn="ctr"/>
+            <a:r>
+              <a:rPr lang="en-US" dirty="0"/>
+              <a:t>Commit 3</a:t>
+            </a:r>
+          </a:p>
+        </p:txBody>
+      </p:sp>
+      <p:cxnSp>
+        <p:nvCxnSpPr>
+          <p:cNvPr id="13" name="Straight Connector 12">
+            <a:extLst>
+              <a:ext uri="{FF2B5EF4-FFF2-40B4-BE49-F238E27FC236}">
+                <a16:creationId xmlns:a16="http://schemas.microsoft.com/office/drawing/2014/main" id="{2286E039-02CE-4E81-1E7A-DE691EE8D675}"/>
+              </a:ext>
+            </a:extLst>
+          </p:cNvPr>
+          <p:cNvCxnSpPr>
+            <a:cxnSpLocks/>
+            <a:stCxn id="12" idx="2"/>
+            <a:endCxn id="11" idx="0"/>
+          </p:cNvCxnSpPr>
+          <p:nvPr/>
+        </p:nvCxnSpPr>
+        <p:spPr>
+          <a:xfrm>
+            <a:off x="4126859" y="5439508"/>
+            <a:ext cx="0" cy="146304"/>
+          </a:xfrm>
+          <a:prstGeom prst="line">
+            <a:avLst/>
+          </a:prstGeom>
+          <a:ln w="19050"/>
+        </p:spPr>
+        <p:style>
+          <a:lnRef idx="1">
+            <a:schemeClr val="accent1"/>
+          </a:lnRef>
+          <a:fillRef idx="0">
+            <a:schemeClr val="accent1"/>
+          </a:fillRef>
+          <a:effectRef idx="0">
+            <a:schemeClr val="accent1"/>
+          </a:effectRef>
+          <a:fontRef idx="minor">
+            <a:schemeClr val="tx1"/>
+          </a:fontRef>
+        </p:style>
+      </p:cxnSp>
+      <p:cxnSp>
+        <p:nvCxnSpPr>
+          <p:cNvPr id="14" name="Straight Connector 13">
+            <a:extLst>
+              <a:ext uri="{FF2B5EF4-FFF2-40B4-BE49-F238E27FC236}">
+                <a16:creationId xmlns:a16="http://schemas.microsoft.com/office/drawing/2014/main" id="{BF9A3126-CB45-E876-51AE-0791B83AD12D}"/>
+              </a:ext>
+            </a:extLst>
+          </p:cNvPr>
+          <p:cNvCxnSpPr>
+            <a:cxnSpLocks/>
+            <a:stCxn id="10" idx="0"/>
+            <a:endCxn id="11" idx="2"/>
+          </p:cNvCxnSpPr>
+          <p:nvPr/>
+        </p:nvCxnSpPr>
+        <p:spPr>
+          <a:xfrm flipV="1">
+            <a:off x="4126859" y="5977988"/>
+            <a:ext cx="0" cy="146304"/>
+          </a:xfrm>
+          <a:prstGeom prst="line">
+            <a:avLst/>
+          </a:prstGeom>
+          <a:ln w="19050"/>
+        </p:spPr>
+        <p:style>
+          <a:lnRef idx="1">
+            <a:schemeClr val="accent1"/>
+          </a:lnRef>
+          <a:fillRef idx="0">
+            <a:schemeClr val="accent1"/>
+          </a:fillRef>
+          <a:effectRef idx="0">
+            <a:schemeClr val="accent1"/>
+          </a:effectRef>
+          <a:fontRef idx="minor">
+            <a:schemeClr val="tx1"/>
+          </a:fontRef>
+        </p:style>
+      </p:cxnSp>
+      <p:sp>
+        <p:nvSpPr>
+          <p:cNvPr id="15" name="TextBox 14">
+            <a:extLst>
+              <a:ext uri="{FF2B5EF4-FFF2-40B4-BE49-F238E27FC236}">
+                <a16:creationId xmlns:a16="http://schemas.microsoft.com/office/drawing/2014/main" id="{00398AAD-3EAB-01E8-7026-677B9D002CB9}"/>
+              </a:ext>
+            </a:extLst>
+          </p:cNvPr>
+          <p:cNvSpPr txBox="1"/>
+          <p:nvPr/>
+        </p:nvSpPr>
+        <p:spPr>
+          <a:xfrm>
+            <a:off x="3135177" y="3600548"/>
+            <a:ext cx="1983363" cy="369332"/>
+          </a:xfrm>
+          <a:prstGeom prst="rect">
+            <a:avLst/>
+          </a:prstGeom>
+          <a:noFill/>
+        </p:spPr>
+        <p:txBody>
+          <a:bodyPr wrap="none" rtlCol="0">
+            <a:spAutoFit/>
+          </a:bodyPr>
+          <a:lstStyle/>
+          <a:p>
+            <a:r>
+              <a:rPr lang="en-US" dirty="0"/>
+              <a:t>Personal Computer</a:t>
+            </a:r>
+          </a:p>
+        </p:txBody>
+      </p:sp>
+      <p:sp>
+        <p:nvSpPr>
+          <p:cNvPr id="16" name="Terminator 15">
+            <a:extLst>
+              <a:ext uri="{FF2B5EF4-FFF2-40B4-BE49-F238E27FC236}">
+                <a16:creationId xmlns:a16="http://schemas.microsoft.com/office/drawing/2014/main" id="{47E0552E-1644-41EC-2F3D-F304A935EB02}"/>
+              </a:ext>
+            </a:extLst>
+          </p:cNvPr>
+          <p:cNvSpPr/>
+          <p:nvPr/>
+        </p:nvSpPr>
+        <p:spPr>
+          <a:xfrm>
+            <a:off x="7463365" y="6093656"/>
+            <a:ext cx="1452880" cy="396240"/>
+          </a:xfrm>
+          <a:prstGeom prst="flowChartTerminator">
+            <a:avLst/>
+          </a:prstGeom>
+        </p:spPr>
+        <p:style>
+          <a:lnRef idx="2">
+            <a:schemeClr val="accent1">
+              <a:shade val="15000"/>
+            </a:schemeClr>
+          </a:lnRef>
+          <a:fillRef idx="1">
+            <a:schemeClr val="accent1"/>
+          </a:fillRef>
+          <a:effectRef idx="0">
+            <a:schemeClr val="accent1"/>
+          </a:effectRef>
+          <a:fontRef idx="minor">
+            <a:schemeClr val="lt1"/>
+          </a:fontRef>
+        </p:style>
+        <p:txBody>
+          <a:bodyPr rtlCol="0" anchor="ctr"/>
+          <a:lstStyle/>
+          <a:p>
+            <a:pPr algn="ctr"/>
+            <a:r>
+              <a:rPr lang="en-US" dirty="0"/>
+              <a:t>Commit 1</a:t>
+            </a:r>
+          </a:p>
+        </p:txBody>
+      </p:sp>
+      <p:sp>
+        <p:nvSpPr>
+          <p:cNvPr id="17" name="Terminator 16">
+            <a:extLst>
+              <a:ext uri="{FF2B5EF4-FFF2-40B4-BE49-F238E27FC236}">
+                <a16:creationId xmlns:a16="http://schemas.microsoft.com/office/drawing/2014/main" id="{805C3988-E51F-F300-E418-294D323DE490}"/>
+              </a:ext>
+            </a:extLst>
+          </p:cNvPr>
+          <p:cNvSpPr/>
+          <p:nvPr/>
+        </p:nvSpPr>
+        <p:spPr>
+          <a:xfrm>
+            <a:off x="7463365" y="5555176"/>
+            <a:ext cx="1452880" cy="396240"/>
+          </a:xfrm>
+          <a:prstGeom prst="flowChartTerminator">
+            <a:avLst/>
+          </a:prstGeom>
+        </p:spPr>
+        <p:style>
+          <a:lnRef idx="2">
+            <a:schemeClr val="accent1">
+              <a:shade val="15000"/>
+            </a:schemeClr>
+          </a:lnRef>
+          <a:fillRef idx="1">
+            <a:schemeClr val="accent1"/>
+          </a:fillRef>
+          <a:effectRef idx="0">
+            <a:schemeClr val="accent1"/>
+          </a:effectRef>
+          <a:fontRef idx="minor">
+            <a:schemeClr val="lt1"/>
+          </a:fontRef>
+        </p:style>
+        <p:txBody>
+          <a:bodyPr rtlCol="0" anchor="ctr"/>
+          <a:lstStyle/>
+          <a:p>
+            <a:pPr algn="ctr"/>
+            <a:r>
+              <a:rPr lang="en-US" dirty="0"/>
+              <a:t>Commit 2</a:t>
+            </a:r>
+          </a:p>
+        </p:txBody>
+      </p:sp>
+      <p:sp>
+        <p:nvSpPr>
+          <p:cNvPr id="18" name="Terminator 17">
+            <a:extLst>
+              <a:ext uri="{FF2B5EF4-FFF2-40B4-BE49-F238E27FC236}">
+                <a16:creationId xmlns:a16="http://schemas.microsoft.com/office/drawing/2014/main" id="{FC3C1BA5-AE1B-6B73-9822-6D5CF1391A57}"/>
+              </a:ext>
+            </a:extLst>
+          </p:cNvPr>
+          <p:cNvSpPr/>
+          <p:nvPr/>
+        </p:nvSpPr>
+        <p:spPr>
+          <a:xfrm>
+            <a:off x="7463365" y="5016696"/>
+            <a:ext cx="1452880" cy="396240"/>
+          </a:xfrm>
+          <a:prstGeom prst="flowChartTerminator">
+            <a:avLst/>
+          </a:prstGeom>
+        </p:spPr>
+        <p:style>
+          <a:lnRef idx="2">
+            <a:schemeClr val="accent2">
+              <a:shade val="15000"/>
+            </a:schemeClr>
+          </a:lnRef>
+          <a:fillRef idx="1">
+            <a:schemeClr val="accent2"/>
+          </a:fillRef>
+          <a:effectRef idx="0">
+            <a:schemeClr val="accent2"/>
+          </a:effectRef>
+          <a:fontRef idx="minor">
+            <a:schemeClr val="lt1"/>
+          </a:fontRef>
+        </p:style>
+        <p:txBody>
+          <a:bodyPr rtlCol="0" anchor="ctr"/>
+          <a:lstStyle/>
+          <a:p>
+            <a:pPr algn="ctr"/>
+            <a:r>
+              <a:rPr lang="en-US" dirty="0"/>
+              <a:t>Commit 3</a:t>
+            </a:r>
+          </a:p>
+        </p:txBody>
+      </p:sp>
+      <p:cxnSp>
+        <p:nvCxnSpPr>
+          <p:cNvPr id="19" name="Straight Connector 18">
+            <a:extLst>
+              <a:ext uri="{FF2B5EF4-FFF2-40B4-BE49-F238E27FC236}">
+                <a16:creationId xmlns:a16="http://schemas.microsoft.com/office/drawing/2014/main" id="{638CD68D-F821-069C-6116-84B24C16750E}"/>
+              </a:ext>
+            </a:extLst>
+          </p:cNvPr>
+          <p:cNvCxnSpPr>
+            <a:cxnSpLocks/>
+            <a:stCxn id="18" idx="2"/>
+            <a:endCxn id="17" idx="0"/>
+          </p:cNvCxnSpPr>
+          <p:nvPr/>
+        </p:nvCxnSpPr>
+        <p:spPr>
+          <a:xfrm>
+            <a:off x="8189805" y="5412936"/>
+            <a:ext cx="0" cy="146304"/>
+          </a:xfrm>
+          <a:prstGeom prst="line">
+            <a:avLst/>
+          </a:prstGeom>
+          <a:ln w="19050"/>
+        </p:spPr>
+        <p:style>
+          <a:lnRef idx="1">
+            <a:schemeClr val="accent1"/>
+          </a:lnRef>
+          <a:fillRef idx="0">
+            <a:schemeClr val="accent1"/>
+          </a:fillRef>
+          <a:effectRef idx="0">
+            <a:schemeClr val="accent1"/>
+          </a:effectRef>
+          <a:fontRef idx="minor">
+            <a:schemeClr val="tx1"/>
+          </a:fontRef>
+        </p:style>
+      </p:cxnSp>
+      <p:cxnSp>
+        <p:nvCxnSpPr>
+          <p:cNvPr id="20" name="Straight Connector 19">
+            <a:extLst>
+              <a:ext uri="{FF2B5EF4-FFF2-40B4-BE49-F238E27FC236}">
+                <a16:creationId xmlns:a16="http://schemas.microsoft.com/office/drawing/2014/main" id="{0B3B599A-50AA-454F-98E8-D81E4255451A}"/>
+              </a:ext>
+            </a:extLst>
+          </p:cNvPr>
+          <p:cNvCxnSpPr>
+            <a:cxnSpLocks/>
+            <a:stCxn id="16" idx="0"/>
+            <a:endCxn id="17" idx="2"/>
+          </p:cNvCxnSpPr>
+          <p:nvPr/>
+        </p:nvCxnSpPr>
+        <p:spPr>
+          <a:xfrm flipV="1">
+            <a:off x="8189805" y="5951416"/>
+            <a:ext cx="0" cy="146304"/>
+          </a:xfrm>
+          <a:prstGeom prst="line">
+            <a:avLst/>
+          </a:prstGeom>
+          <a:ln w="19050"/>
+        </p:spPr>
+        <p:style>
+          <a:lnRef idx="1">
+            <a:schemeClr val="accent1"/>
+          </a:lnRef>
+          <a:fillRef idx="0">
+            <a:schemeClr val="accent1"/>
+          </a:fillRef>
+          <a:effectRef idx="0">
+            <a:schemeClr val="accent1"/>
+          </a:effectRef>
+          <a:fontRef idx="minor">
+            <a:schemeClr val="tx1"/>
+          </a:fontRef>
+        </p:style>
+      </p:cxnSp>
+      <p:sp>
+        <p:nvSpPr>
+          <p:cNvPr id="21" name="TextBox 20">
+            <a:extLst>
+              <a:ext uri="{FF2B5EF4-FFF2-40B4-BE49-F238E27FC236}">
+                <a16:creationId xmlns:a16="http://schemas.microsoft.com/office/drawing/2014/main" id="{95D88EC0-52AB-8E87-BA30-F5EB91497F2C}"/>
+              </a:ext>
+            </a:extLst>
+          </p:cNvPr>
+          <p:cNvSpPr txBox="1"/>
+          <p:nvPr/>
+        </p:nvSpPr>
+        <p:spPr>
+          <a:xfrm>
+            <a:off x="7271701" y="3573976"/>
+            <a:ext cx="1836208" cy="369332"/>
+          </a:xfrm>
+          <a:prstGeom prst="rect">
+            <a:avLst/>
+          </a:prstGeom>
+          <a:noFill/>
+        </p:spPr>
+        <p:txBody>
+          <a:bodyPr wrap="none" rtlCol="0">
+            <a:spAutoFit/>
+          </a:bodyPr>
+          <a:lstStyle/>
+          <a:p>
+            <a:r>
+              <a:rPr lang="en-US" dirty="0"/>
+              <a:t>Cluster Computer</a:t>
+            </a:r>
+          </a:p>
+        </p:txBody>
+      </p:sp>
+      <p:sp>
+        <p:nvSpPr>
+          <p:cNvPr id="22" name="Terminator 21">
+            <a:extLst>
+              <a:ext uri="{FF2B5EF4-FFF2-40B4-BE49-F238E27FC236}">
+                <a16:creationId xmlns:a16="http://schemas.microsoft.com/office/drawing/2014/main" id="{364AB25F-DF34-8005-2858-8B425138C74C}"/>
+              </a:ext>
+            </a:extLst>
+          </p:cNvPr>
+          <p:cNvSpPr/>
+          <p:nvPr/>
+        </p:nvSpPr>
+        <p:spPr>
+          <a:xfrm>
+            <a:off x="5389671" y="2577664"/>
+            <a:ext cx="1452880" cy="396240"/>
+          </a:xfrm>
+          <a:prstGeom prst="flowChartTerminator">
+            <a:avLst/>
+          </a:prstGeom>
+        </p:spPr>
+        <p:style>
+          <a:lnRef idx="2">
+            <a:schemeClr val="accent1">
+              <a:shade val="15000"/>
+            </a:schemeClr>
+          </a:lnRef>
+          <a:fillRef idx="1">
+            <a:schemeClr val="accent1"/>
+          </a:fillRef>
+          <a:effectRef idx="0">
+            <a:schemeClr val="accent1"/>
+          </a:effectRef>
+          <a:fontRef idx="minor">
+            <a:schemeClr val="lt1"/>
+          </a:fontRef>
+        </p:style>
+        <p:txBody>
+          <a:bodyPr rtlCol="0" anchor="ctr"/>
+          <a:lstStyle/>
+          <a:p>
+            <a:pPr algn="ctr"/>
+            <a:r>
+              <a:rPr lang="en-US" dirty="0"/>
+              <a:t>Commit 1</a:t>
+            </a:r>
+          </a:p>
+        </p:txBody>
+      </p:sp>
+      <p:sp>
+        <p:nvSpPr>
+          <p:cNvPr id="23" name="Terminator 22">
+            <a:extLst>
+              <a:ext uri="{FF2B5EF4-FFF2-40B4-BE49-F238E27FC236}">
+                <a16:creationId xmlns:a16="http://schemas.microsoft.com/office/drawing/2014/main" id="{4BEC1E42-5E54-D2CB-7992-E46DACA5142C}"/>
+              </a:ext>
+            </a:extLst>
+          </p:cNvPr>
+          <p:cNvSpPr/>
+          <p:nvPr/>
+        </p:nvSpPr>
+        <p:spPr>
+          <a:xfrm>
+            <a:off x="5389671" y="2039184"/>
+            <a:ext cx="1452880" cy="396240"/>
+          </a:xfrm>
+          <a:prstGeom prst="flowChartTerminator">
+            <a:avLst/>
+          </a:prstGeom>
+        </p:spPr>
+        <p:style>
+          <a:lnRef idx="2">
+            <a:schemeClr val="accent1">
+              <a:shade val="15000"/>
+            </a:schemeClr>
+          </a:lnRef>
+          <a:fillRef idx="1">
+            <a:schemeClr val="accent1"/>
+          </a:fillRef>
+          <a:effectRef idx="0">
+            <a:schemeClr val="accent1"/>
+          </a:effectRef>
+          <a:fontRef idx="minor">
+            <a:schemeClr val="lt1"/>
+          </a:fontRef>
+        </p:style>
+        <p:txBody>
+          <a:bodyPr rtlCol="0" anchor="ctr"/>
+          <a:lstStyle/>
+          <a:p>
+            <a:pPr algn="ctr"/>
+            <a:r>
+              <a:rPr lang="en-US" dirty="0"/>
+              <a:t>Commit 2</a:t>
+            </a:r>
+          </a:p>
+        </p:txBody>
+      </p:sp>
+      <p:sp>
+        <p:nvSpPr>
+          <p:cNvPr id="24" name="Terminator 23">
+            <a:extLst>
+              <a:ext uri="{FF2B5EF4-FFF2-40B4-BE49-F238E27FC236}">
+                <a16:creationId xmlns:a16="http://schemas.microsoft.com/office/drawing/2014/main" id="{7DFD0BCB-5A38-A65C-76FD-39E87B5A3F54}"/>
+              </a:ext>
+            </a:extLst>
+          </p:cNvPr>
+          <p:cNvSpPr/>
+          <p:nvPr/>
+        </p:nvSpPr>
+        <p:spPr>
+          <a:xfrm>
+            <a:off x="5389671" y="1500704"/>
+            <a:ext cx="1452880" cy="396240"/>
+          </a:xfrm>
+          <a:prstGeom prst="flowChartTerminator">
+            <a:avLst/>
+          </a:prstGeom>
+        </p:spPr>
+        <p:style>
+          <a:lnRef idx="2">
+            <a:schemeClr val="accent2">
+              <a:shade val="15000"/>
+            </a:schemeClr>
+          </a:lnRef>
+          <a:fillRef idx="1">
+            <a:schemeClr val="accent2"/>
+          </a:fillRef>
+          <a:effectRef idx="0">
+            <a:schemeClr val="accent2"/>
+          </a:effectRef>
+          <a:fontRef idx="minor">
+            <a:schemeClr val="lt1"/>
+          </a:fontRef>
+        </p:style>
+        <p:txBody>
+          <a:bodyPr rtlCol="0" anchor="ctr"/>
+          <a:lstStyle/>
+          <a:p>
+            <a:pPr algn="ctr"/>
+            <a:r>
+              <a:rPr lang="en-US" dirty="0"/>
+              <a:t>Commit 3</a:t>
+            </a:r>
+          </a:p>
+        </p:txBody>
+      </p:sp>
+      <p:cxnSp>
+        <p:nvCxnSpPr>
+          <p:cNvPr id="25" name="Straight Connector 24">
+            <a:extLst>
+              <a:ext uri="{FF2B5EF4-FFF2-40B4-BE49-F238E27FC236}">
+                <a16:creationId xmlns:a16="http://schemas.microsoft.com/office/drawing/2014/main" id="{CC1642D6-37EB-6BF4-7CFB-379404B835EF}"/>
+              </a:ext>
+            </a:extLst>
+          </p:cNvPr>
+          <p:cNvCxnSpPr>
+            <a:cxnSpLocks/>
+            <a:stCxn id="24" idx="2"/>
+            <a:endCxn id="23" idx="0"/>
+          </p:cNvCxnSpPr>
+          <p:nvPr/>
+        </p:nvCxnSpPr>
+        <p:spPr>
+          <a:xfrm>
+            <a:off x="6116111" y="1896944"/>
+            <a:ext cx="0" cy="146304"/>
+          </a:xfrm>
+          <a:prstGeom prst="line">
+            <a:avLst/>
+          </a:prstGeom>
+          <a:ln w="19050"/>
+        </p:spPr>
+        <p:style>
+          <a:lnRef idx="1">
+            <a:schemeClr val="accent1"/>
+          </a:lnRef>
+          <a:fillRef idx="0">
+            <a:schemeClr val="accent1"/>
+          </a:fillRef>
+          <a:effectRef idx="0">
+            <a:schemeClr val="accent1"/>
+          </a:effectRef>
+          <a:fontRef idx="minor">
+            <a:schemeClr val="tx1"/>
+          </a:fontRef>
+        </p:style>
+      </p:cxnSp>
+      <p:cxnSp>
+        <p:nvCxnSpPr>
+          <p:cNvPr id="26" name="Straight Connector 25">
+            <a:extLst>
+              <a:ext uri="{FF2B5EF4-FFF2-40B4-BE49-F238E27FC236}">
+                <a16:creationId xmlns:a16="http://schemas.microsoft.com/office/drawing/2014/main" id="{297C61E1-15CC-D9AE-EAFF-4CD3A6A9A8DF}"/>
+              </a:ext>
+            </a:extLst>
+          </p:cNvPr>
+          <p:cNvCxnSpPr>
+            <a:cxnSpLocks/>
+            <a:stCxn id="22" idx="0"/>
+            <a:endCxn id="23" idx="2"/>
+          </p:cNvCxnSpPr>
+          <p:nvPr/>
+        </p:nvCxnSpPr>
+        <p:spPr>
+          <a:xfrm flipV="1">
+            <a:off x="6116111" y="2435424"/>
+            <a:ext cx="0" cy="146304"/>
+          </a:xfrm>
+          <a:prstGeom prst="line">
+            <a:avLst/>
+          </a:prstGeom>
+          <a:ln w="19050"/>
+        </p:spPr>
+        <p:style>
+          <a:lnRef idx="1">
+            <a:schemeClr val="accent1"/>
+          </a:lnRef>
+          <a:fillRef idx="0">
+            <a:schemeClr val="accent1"/>
+          </a:fillRef>
+          <a:effectRef idx="0">
+            <a:schemeClr val="accent1"/>
+          </a:effectRef>
+          <a:fontRef idx="minor">
+            <a:schemeClr val="tx1"/>
+          </a:fontRef>
+        </p:style>
+      </p:cxnSp>
+      <p:sp>
+        <p:nvSpPr>
+          <p:cNvPr id="27" name="TextBox 26">
+            <a:extLst>
+              <a:ext uri="{FF2B5EF4-FFF2-40B4-BE49-F238E27FC236}">
+                <a16:creationId xmlns:a16="http://schemas.microsoft.com/office/drawing/2014/main" id="{7D320227-1867-7362-5404-8FB9B8B4C10D}"/>
+              </a:ext>
+            </a:extLst>
+          </p:cNvPr>
+          <p:cNvSpPr txBox="1"/>
+          <p:nvPr/>
+        </p:nvSpPr>
+        <p:spPr>
+          <a:xfrm>
+            <a:off x="5267960" y="539168"/>
+            <a:ext cx="1633652" cy="646331"/>
+          </a:xfrm>
+          <a:prstGeom prst="rect">
+            <a:avLst/>
+          </a:prstGeom>
+          <a:noFill/>
+        </p:spPr>
+        <p:txBody>
+          <a:bodyPr wrap="none" rtlCol="0">
+            <a:spAutoFit/>
+          </a:bodyPr>
+          <a:lstStyle/>
+          <a:p>
+            <a:pPr algn="ctr"/>
+            <a:r>
+              <a:rPr lang="en-US" dirty="0"/>
+              <a:t>GitHub Remote</a:t>
+            </a:r>
+          </a:p>
+          <a:p>
+            <a:pPr algn="ctr"/>
+            <a:r>
+              <a:rPr lang="en-US" dirty="0"/>
+              <a:t>(your fork)</a:t>
+            </a:r>
+          </a:p>
+        </p:txBody>
+      </p:sp>
+      <p:sp>
+        <p:nvSpPr>
+          <p:cNvPr id="28" name="Terminator 27">
+            <a:extLst>
+              <a:ext uri="{FF2B5EF4-FFF2-40B4-BE49-F238E27FC236}">
+                <a16:creationId xmlns:a16="http://schemas.microsoft.com/office/drawing/2014/main" id="{9C7D1E45-7032-AC99-2FDB-BDA7D4E04F28}"/>
+              </a:ext>
+            </a:extLst>
+          </p:cNvPr>
+          <p:cNvSpPr/>
+          <p:nvPr/>
+        </p:nvSpPr>
+        <p:spPr>
+          <a:xfrm>
+            <a:off x="2515451" y="2432907"/>
+            <a:ext cx="1452880" cy="396240"/>
+          </a:xfrm>
+          <a:prstGeom prst="flowChartTerminator">
+            <a:avLst/>
+          </a:prstGeom>
+        </p:spPr>
+        <p:style>
+          <a:lnRef idx="2">
+            <a:schemeClr val="accent1">
+              <a:shade val="15000"/>
+            </a:schemeClr>
+          </a:lnRef>
+          <a:fillRef idx="1">
+            <a:schemeClr val="accent1"/>
+          </a:fillRef>
+          <a:effectRef idx="0">
+            <a:schemeClr val="accent1"/>
+          </a:effectRef>
+          <a:fontRef idx="minor">
+            <a:schemeClr val="lt1"/>
+          </a:fontRef>
+        </p:style>
+        <p:txBody>
+          <a:bodyPr rtlCol="0" anchor="ctr"/>
+          <a:lstStyle/>
+          <a:p>
+            <a:pPr algn="ctr"/>
+            <a:r>
+              <a:rPr lang="en-US" dirty="0"/>
+              <a:t>Commit 1</a:t>
+            </a:r>
+          </a:p>
+        </p:txBody>
+      </p:sp>
+      <p:sp>
+        <p:nvSpPr>
+          <p:cNvPr id="29" name="Terminator 28">
+            <a:extLst>
+              <a:ext uri="{FF2B5EF4-FFF2-40B4-BE49-F238E27FC236}">
+                <a16:creationId xmlns:a16="http://schemas.microsoft.com/office/drawing/2014/main" id="{BB77BFDB-E2FE-449D-71D9-8993761D6F25}"/>
+              </a:ext>
+            </a:extLst>
+          </p:cNvPr>
+          <p:cNvSpPr/>
+          <p:nvPr/>
+        </p:nvSpPr>
+        <p:spPr>
+          <a:xfrm>
+            <a:off x="2515451" y="1894427"/>
+            <a:ext cx="1452880" cy="396240"/>
+          </a:xfrm>
+          <a:prstGeom prst="flowChartTerminator">
+            <a:avLst/>
+          </a:prstGeom>
+        </p:spPr>
+        <p:style>
+          <a:lnRef idx="2">
+            <a:schemeClr val="accent1">
+              <a:shade val="15000"/>
+            </a:schemeClr>
+          </a:lnRef>
+          <a:fillRef idx="1">
+            <a:schemeClr val="accent1"/>
+          </a:fillRef>
+          <a:effectRef idx="0">
+            <a:schemeClr val="accent1"/>
+          </a:effectRef>
+          <a:fontRef idx="minor">
+            <a:schemeClr val="lt1"/>
+          </a:fontRef>
+        </p:style>
+        <p:txBody>
+          <a:bodyPr rtlCol="0" anchor="ctr"/>
+          <a:lstStyle/>
+          <a:p>
+            <a:pPr algn="ctr"/>
+            <a:r>
+              <a:rPr lang="en-US" dirty="0"/>
+              <a:t>Commit 2</a:t>
+            </a:r>
+          </a:p>
+        </p:txBody>
+      </p:sp>
+      <p:cxnSp>
+        <p:nvCxnSpPr>
+          <p:cNvPr id="30" name="Straight Connector 29">
+            <a:extLst>
+              <a:ext uri="{FF2B5EF4-FFF2-40B4-BE49-F238E27FC236}">
+                <a16:creationId xmlns:a16="http://schemas.microsoft.com/office/drawing/2014/main" id="{D3CDA352-BDEA-A240-DDA7-57255B8C76D8}"/>
+              </a:ext>
+            </a:extLst>
+          </p:cNvPr>
+          <p:cNvCxnSpPr>
+            <a:cxnSpLocks/>
+            <a:stCxn id="28" idx="0"/>
+            <a:endCxn id="29" idx="2"/>
+          </p:cNvCxnSpPr>
+          <p:nvPr/>
+        </p:nvCxnSpPr>
+        <p:spPr>
+          <a:xfrm flipV="1">
+            <a:off x="3241891" y="2290667"/>
+            <a:ext cx="0" cy="146304"/>
+          </a:xfrm>
+          <a:prstGeom prst="line">
+            <a:avLst/>
+          </a:prstGeom>
+          <a:ln w="19050"/>
+        </p:spPr>
+        <p:style>
+          <a:lnRef idx="1">
+            <a:schemeClr val="accent1"/>
+          </a:lnRef>
+          <a:fillRef idx="0">
+            <a:schemeClr val="accent1"/>
+          </a:fillRef>
+          <a:effectRef idx="0">
+            <a:schemeClr val="accent1"/>
+          </a:effectRef>
+          <a:fontRef idx="minor">
+            <a:schemeClr val="tx1"/>
+          </a:fontRef>
+        </p:style>
+      </p:cxnSp>
+      <p:sp>
+        <p:nvSpPr>
+          <p:cNvPr id="31" name="TextBox 30">
+            <a:extLst>
+              <a:ext uri="{FF2B5EF4-FFF2-40B4-BE49-F238E27FC236}">
+                <a16:creationId xmlns:a16="http://schemas.microsoft.com/office/drawing/2014/main" id="{87F2AE8A-CC1B-26FE-C17F-A0AFB22E301E}"/>
+              </a:ext>
+            </a:extLst>
+          </p:cNvPr>
+          <p:cNvSpPr txBox="1"/>
+          <p:nvPr/>
+        </p:nvSpPr>
+        <p:spPr>
+          <a:xfrm>
+            <a:off x="2456266" y="569162"/>
+            <a:ext cx="1571264" cy="646331"/>
+          </a:xfrm>
+          <a:prstGeom prst="rect">
+            <a:avLst/>
+          </a:prstGeom>
+          <a:noFill/>
+        </p:spPr>
+        <p:txBody>
+          <a:bodyPr wrap="none" rtlCol="0">
+            <a:spAutoFit/>
+          </a:bodyPr>
+          <a:lstStyle/>
+          <a:p>
+            <a:pPr algn="ctr"/>
+            <a:r>
+              <a:rPr lang="en-US" dirty="0"/>
+              <a:t>Original Repo </a:t>
+            </a:r>
+          </a:p>
+          <a:p>
+            <a:pPr algn="ctr"/>
+            <a:r>
+              <a:rPr lang="en-US" dirty="0"/>
+              <a:t>(lab repo)</a:t>
+            </a:r>
+          </a:p>
+        </p:txBody>
+      </p:sp>
+      <p:cxnSp>
+        <p:nvCxnSpPr>
+          <p:cNvPr id="33" name="Straight Arrow Connector 32">
+            <a:extLst>
+              <a:ext uri="{FF2B5EF4-FFF2-40B4-BE49-F238E27FC236}">
+                <a16:creationId xmlns:a16="http://schemas.microsoft.com/office/drawing/2014/main" id="{C388079E-8CC9-7DDB-5F8B-443514A3595E}"/>
+              </a:ext>
+            </a:extLst>
+          </p:cNvPr>
+          <p:cNvCxnSpPr>
+            <a:cxnSpLocks/>
+            <a:stCxn id="21" idx="0"/>
+            <a:endCxn id="5" idx="2"/>
+          </p:cNvCxnSpPr>
+          <p:nvPr/>
+        </p:nvCxnSpPr>
+        <p:spPr>
+          <a:xfrm flipH="1" flipV="1">
+            <a:off x="6096000" y="3079708"/>
+            <a:ext cx="2093805" cy="494268"/>
+          </a:xfrm>
+          <a:prstGeom prst="straightConnector1">
+            <a:avLst/>
+          </a:prstGeom>
+          <a:ln w="38100">
+            <a:solidFill>
+              <a:schemeClr val="accent1"/>
+            </a:solidFill>
+            <a:headEnd type="triangle"/>
+            <a:tailEnd type="none"/>
+          </a:ln>
+        </p:spPr>
+        <p:style>
+          <a:lnRef idx="1">
+            <a:schemeClr val="accent1"/>
+          </a:lnRef>
+          <a:fillRef idx="0">
+            <a:schemeClr val="accent1"/>
+          </a:fillRef>
+          <a:effectRef idx="0">
+            <a:schemeClr val="accent1"/>
+          </a:effectRef>
+          <a:fontRef idx="minor">
+            <a:schemeClr val="tx1"/>
+          </a:fontRef>
+        </p:style>
+      </p:cxnSp>
+      <p:sp>
+        <p:nvSpPr>
+          <p:cNvPr id="35" name="Terminator 34">
+            <a:extLst>
+              <a:ext uri="{FF2B5EF4-FFF2-40B4-BE49-F238E27FC236}">
+                <a16:creationId xmlns:a16="http://schemas.microsoft.com/office/drawing/2014/main" id="{B47BBD02-E63C-4673-F3AD-BA6BAAA37936}"/>
+              </a:ext>
+            </a:extLst>
+          </p:cNvPr>
+          <p:cNvSpPr/>
+          <p:nvPr/>
+        </p:nvSpPr>
+        <p:spPr>
+          <a:xfrm>
+            <a:off x="3420530" y="4121388"/>
+            <a:ext cx="1452880" cy="396240"/>
+          </a:xfrm>
+          <a:prstGeom prst="flowChartTerminator">
+            <a:avLst/>
+          </a:prstGeom>
+        </p:spPr>
+        <p:style>
+          <a:lnRef idx="2">
+            <a:schemeClr val="accent2">
+              <a:shade val="15000"/>
+            </a:schemeClr>
+          </a:lnRef>
+          <a:fillRef idx="1">
+            <a:schemeClr val="accent2"/>
+          </a:fillRef>
+          <a:effectRef idx="0">
+            <a:schemeClr val="accent2"/>
+          </a:effectRef>
+          <a:fontRef idx="minor">
+            <a:schemeClr val="lt1"/>
+          </a:fontRef>
+        </p:style>
+        <p:txBody>
+          <a:bodyPr rtlCol="0" anchor="ctr"/>
+          <a:lstStyle/>
+          <a:p>
+            <a:pPr algn="ctr"/>
+            <a:r>
+              <a:rPr lang="en-US" dirty="0"/>
+              <a:t>File(s)</a:t>
+            </a:r>
+          </a:p>
+        </p:txBody>
+      </p:sp>
+      <p:sp>
+        <p:nvSpPr>
+          <p:cNvPr id="36" name="Terminator 35">
+            <a:extLst>
+              <a:ext uri="{FF2B5EF4-FFF2-40B4-BE49-F238E27FC236}">
+                <a16:creationId xmlns:a16="http://schemas.microsoft.com/office/drawing/2014/main" id="{92DE398E-7658-5B34-26D8-469681337140}"/>
+              </a:ext>
+            </a:extLst>
+          </p:cNvPr>
+          <p:cNvSpPr/>
+          <p:nvPr/>
+        </p:nvSpPr>
+        <p:spPr>
+          <a:xfrm>
+            <a:off x="7465905" y="4121388"/>
+            <a:ext cx="1452880" cy="396240"/>
+          </a:xfrm>
+          <a:prstGeom prst="flowChartTerminator">
+            <a:avLst/>
+          </a:prstGeom>
+        </p:spPr>
+        <p:style>
+          <a:lnRef idx="2">
+            <a:schemeClr val="accent2">
+              <a:shade val="15000"/>
+            </a:schemeClr>
+          </a:lnRef>
+          <a:fillRef idx="1">
+            <a:schemeClr val="accent2"/>
+          </a:fillRef>
+          <a:effectRef idx="0">
+            <a:schemeClr val="accent2"/>
+          </a:effectRef>
+          <a:fontRef idx="minor">
+            <a:schemeClr val="lt1"/>
+          </a:fontRef>
+        </p:style>
+        <p:txBody>
+          <a:bodyPr rtlCol="0" anchor="ctr"/>
+          <a:lstStyle/>
+          <a:p>
+            <a:pPr algn="ctr"/>
+            <a:r>
+              <a:rPr lang="en-US" dirty="0"/>
+              <a:t>File(s)</a:t>
+            </a:r>
+          </a:p>
+        </p:txBody>
+      </p:sp>
+      <p:pic>
+        <p:nvPicPr>
+          <p:cNvPr id="37" name="Picture 36" descr="A black cat with a white circle in the background&#10;&#10;Description automatically generated">
+            <a:extLst>
+              <a:ext uri="{FF2B5EF4-FFF2-40B4-BE49-F238E27FC236}">
+                <a16:creationId xmlns:a16="http://schemas.microsoft.com/office/drawing/2014/main" id="{F33F32D5-E9E0-C1B0-7224-0A0ECE395C44}"/>
+              </a:ext>
+            </a:extLst>
+          </p:cNvPr>
+          <p:cNvPicPr>
+            <a:picLocks noChangeAspect="1"/>
+          </p:cNvPicPr>
+          <p:nvPr/>
+        </p:nvPicPr>
+        <p:blipFill>
+          <a:blip r:embed="rId3">
+            <a:alphaModFix/>
+          </a:blip>
+          <a:stretch>
+            <a:fillRect/>
+          </a:stretch>
+        </p:blipFill>
+        <p:spPr>
+          <a:xfrm>
+            <a:off x="298453" y="520649"/>
+            <a:ext cx="1332653" cy="1303682"/>
+          </a:xfrm>
+          <a:prstGeom prst="rect">
+            <a:avLst/>
+          </a:prstGeom>
+          <a:solidFill>
+            <a:schemeClr val="accent1"/>
+          </a:solidFill>
+        </p:spPr>
+      </p:pic>
+      <p:pic>
+        <p:nvPicPr>
+          <p:cNvPr id="38" name="Graphic 37" descr="Laptop with solid fill">
+            <a:extLst>
+              <a:ext uri="{FF2B5EF4-FFF2-40B4-BE49-F238E27FC236}">
+                <a16:creationId xmlns:a16="http://schemas.microsoft.com/office/drawing/2014/main" id="{6D49662D-6C04-3073-C51B-FB57A07EDE0A}"/>
+              </a:ext>
+            </a:extLst>
+          </p:cNvPr>
+          <p:cNvPicPr>
+            <a:picLocks noChangeAspect="1"/>
+          </p:cNvPicPr>
+          <p:nvPr/>
+        </p:nvPicPr>
+        <p:blipFill>
+          <a:blip r:embed="rId4">
+            <a:extLst>
+              <a:ext uri="{96DAC541-7B7A-43D3-8B79-37D633B846F1}">
+                <asvg:svgBlip xmlns:asvg="http://schemas.microsoft.com/office/drawing/2016/SVG/main" r:embed="rId5"/>
+              </a:ext>
+            </a:extLst>
+          </a:blip>
+          <a:stretch>
+            <a:fillRect/>
+          </a:stretch>
+        </p:blipFill>
+        <p:spPr>
+          <a:xfrm>
+            <a:off x="9278" y="4628044"/>
+            <a:ext cx="2133917" cy="2133917"/>
+          </a:xfrm>
+          <a:prstGeom prst="rect">
+            <a:avLst/>
+          </a:prstGeom>
+        </p:spPr>
+      </p:pic>
+      <p:sp>
+        <p:nvSpPr>
+          <p:cNvPr id="39" name="TextBox 38">
+            <a:extLst>
+              <a:ext uri="{FF2B5EF4-FFF2-40B4-BE49-F238E27FC236}">
+                <a16:creationId xmlns:a16="http://schemas.microsoft.com/office/drawing/2014/main" id="{0F46598B-AED5-15D6-243E-ABB3481AC5C0}"/>
+              </a:ext>
+            </a:extLst>
+          </p:cNvPr>
+          <p:cNvSpPr txBox="1"/>
+          <p:nvPr/>
+        </p:nvSpPr>
+        <p:spPr>
+          <a:xfrm rot="933119">
+            <a:off x="7297253" y="3069037"/>
+            <a:ext cx="691215" cy="369332"/>
+          </a:xfrm>
+          <a:prstGeom prst="rect">
+            <a:avLst/>
+          </a:prstGeom>
+          <a:noFill/>
+        </p:spPr>
+        <p:txBody>
+          <a:bodyPr wrap="none" rtlCol="0">
+            <a:spAutoFit/>
+          </a:bodyPr>
+          <a:lstStyle/>
+          <a:p>
+            <a:r>
+              <a:rPr lang="en-US">
+                <a:highlight>
+                  <a:srgbClr val="FFFF00"/>
+                </a:highlight>
+                <a:latin typeface="Consolas" panose="020B0609020204030204" pitchFamily="49" charset="0"/>
+                <a:cs typeface="Consolas" panose="020B0609020204030204" pitchFamily="49" charset="0"/>
+              </a:rPr>
+              <a:t>pull</a:t>
+            </a:r>
+          </a:p>
+        </p:txBody>
+      </p:sp>
+    </p:spTree>
+    <p:extLst>
+      <p:ext uri="{BB962C8B-B14F-4D97-AF65-F5344CB8AC3E}">
+        <p14:creationId xmlns:p14="http://schemas.microsoft.com/office/powerpoint/2010/main" val="1377941306"/>
+      </p:ext>
+    </p:extLst>
+  </p:cSld>
+  <p:clrMapOvr>
+    <a:masterClrMapping/>
+  </p:clrMapOvr>
+</p:sld>
+</file>
+
+<file path=ppt/slides/slide31.xml><?xml version="1.0" encoding="utf-8"?>
+<p:sld xmlns:a="http://schemas.openxmlformats.org/drawingml/2006/main" xmlns:r="http://schemas.openxmlformats.org/officeDocument/2006/relationships" xmlns:p="http://schemas.openxmlformats.org/presentationml/2006/main">
+  <p:cSld>
+    <p:spTree>
+      <p:nvGrpSpPr>
+        <p:cNvPr id="1" name="">
+          <a:extLst>
+            <a:ext uri="{FF2B5EF4-FFF2-40B4-BE49-F238E27FC236}">
               <a16:creationId xmlns:a16="http://schemas.microsoft.com/office/drawing/2014/main" id="{713B31F4-BA85-EDD5-65ED-7D7F4444FCCC}"/>
             </a:ext>
           </a:extLst>
@@ -29171,7 +29455,7 @@
 </p:sld>
 </file>
 
-<file path=ppt/slides/slide31.xml><?xml version="1.0" encoding="utf-8"?>
+<file path=ppt/slides/slide32.xml><?xml version="1.0" encoding="utf-8"?>
 <p:sld xmlns:a="http://schemas.openxmlformats.org/drawingml/2006/main" xmlns:r="http://schemas.openxmlformats.org/officeDocument/2006/relationships" xmlns:p="http://schemas.openxmlformats.org/presentationml/2006/main">
   <p:cSld>
     <p:bg>
@@ -30401,7 +30685,7 @@
 </p:sld>
 </file>
 
-<file path=ppt/slides/slide32.xml><?xml version="1.0" encoding="utf-8"?>
+<file path=ppt/slides/slide33.xml><?xml version="1.0" encoding="utf-8"?>
 <p:sld xmlns:a="http://schemas.openxmlformats.org/drawingml/2006/main" xmlns:r="http://schemas.openxmlformats.org/officeDocument/2006/relationships" xmlns:p="http://schemas.openxmlformats.org/presentationml/2006/main">
   <p:cSld>
     <p:spTree>
@@ -30490,7 +30774,7 @@
 </p:sld>
 </file>
 
-<file path=ppt/slides/slide33.xml><?xml version="1.0" encoding="utf-8"?>
+<file path=ppt/slides/slide34.xml><?xml version="1.0" encoding="utf-8"?>
 <p:sld xmlns:a="http://schemas.openxmlformats.org/drawingml/2006/main" xmlns:r="http://schemas.openxmlformats.org/officeDocument/2006/relationships" xmlns:p="http://schemas.openxmlformats.org/presentationml/2006/main">
   <p:cSld>
     <p:spTree>
@@ -31091,7 +31375,7 @@
 </p:sld>
 </file>
 
-<file path=ppt/slides/slide34.xml><?xml version="1.0" encoding="utf-8"?>
+<file path=ppt/slides/slide35.xml><?xml version="1.0" encoding="utf-8"?>
 <p:sld xmlns:a="http://schemas.openxmlformats.org/drawingml/2006/main" xmlns:r="http://schemas.openxmlformats.org/officeDocument/2006/relationships" xmlns:p="http://schemas.openxmlformats.org/presentationml/2006/main">
   <p:cSld>
     <p:spTree>
@@ -31982,7 +32266,7 @@
 </p:sld>
 </file>
 
-<file path=ppt/slides/slide35.xml><?xml version="1.0" encoding="utf-8"?>
+<file path=ppt/slides/slide36.xml><?xml version="1.0" encoding="utf-8"?>
 <p:sld xmlns:a="http://schemas.openxmlformats.org/drawingml/2006/main" xmlns:r="http://schemas.openxmlformats.org/officeDocument/2006/relationships" xmlns:p="http://schemas.openxmlformats.org/presentationml/2006/main">
   <p:cSld>
     <p:bg>
@@ -33440,7 +33724,7 @@
 </p:sld>
 </file>
 
-<file path=ppt/slides/slide36.xml><?xml version="1.0" encoding="utf-8"?>
+<file path=ppt/slides/slide37.xml><?xml version="1.0" encoding="utf-8"?>
 <p:sld xmlns:a="http://schemas.openxmlformats.org/drawingml/2006/main" xmlns:r="http://schemas.openxmlformats.org/officeDocument/2006/relationships" xmlns:p="http://schemas.openxmlformats.org/presentationml/2006/main">
   <p:cSld>
     <p:spTree>
